--- a/curso/pptx/S26.pptx
+++ b/curso/pptx/S26.pptx
@@ -3890,8 +3890,8 @@
         </p:nvSpPr>
         <p:spPr>
           <a:xfrm>
-            <a:off x="640000" y="420000"/>
-            <a:ext cx="10912000" cy="420000"/>
+            <a:off x="10652000" y="380000"/>
+            <a:ext cx="900000" cy="800000"/>
           </a:xfrm>
           <a:prstGeom prst="rect">
             <a:avLst/>
@@ -3906,17 +3906,17 @@
           <a:p>
             <a:pPr>
               <a:spcAft>
-                <a:spcPts val="810"/>
+                <a:spcPts val="1980"/>
               </a:spcAft>
             </a:pPr>
             <a:r>
-              <a:rPr sz="1800" b="1">
+              <a:rPr sz="4400" b="0">
                 <a:solidFill>
                   <a:srgbClr val="1F2A44"/>
                 </a:solidFill>
                 <a:latin typeface="Nunito Sans"/>
               </a:rPr>
-              <a:t>🦉 Aula de Filosofía</a:t>
+              <a:t>🙃</a:t>
             </a:r>
           </a:p>
         </p:txBody>

--- a/curso/pptx/S26.pptx
+++ b/curso/pptx/S26.pptx
@@ -471,426 +471,6 @@
     </a:lvl9pPr>
   </p:notesStyle>
 </p:notesMaster>
-</file>
-
-<file path=ppt/notesSlides/notesSlide1.xml><?xml version="1.0" encoding="utf-8"?>
-<p:notes xmlns:a="http://schemas.openxmlformats.org/drawingml/2006/main" xmlns:p="http://schemas.openxmlformats.org/presentationml/2006/main" xmlns:r="http://schemas.openxmlformats.org/officeDocument/2006/relationships">
-  <p:cSld>
-    <p:spTree>
-      <p:nvGrpSpPr>
-        <p:cNvPr id="1" name=""/>
-        <p:cNvGrpSpPr/>
-        <p:nvPr/>
-      </p:nvGrpSpPr>
-      <p:grpSpPr>
-        <a:xfrm>
-          <a:off x="0" y="0"/>
-          <a:ext cx="0" cy="0"/>
-          <a:chOff x="0" y="0"/>
-          <a:chExt cx="0" cy="0"/>
-        </a:xfrm>
-      </p:grpSpPr>
-      <p:sp>
-        <p:nvSpPr>
-          <p:cNvPr id="2" name="Slide Image Placeholder 1"/>
-          <p:cNvSpPr>
-            <a:spLocks noGrp="1"/>
-          </p:cNvSpPr>
-          <p:nvPr>
-            <p:ph type="sldImg" idx="2"/>
-          </p:nvPr>
-        </p:nvSpPr>
-        <p:spPr/>
-      </p:sp>
-      <p:sp>
-        <p:nvSpPr>
-          <p:cNvPr id="3" name="Notes Placeholder 2"/>
-          <p:cNvSpPr>
-            <a:spLocks noGrp="1"/>
-          </p:cNvSpPr>
-          <p:nvPr>
-            <p:ph type="body" idx="3" sz="quarter"/>
-          </p:nvPr>
-        </p:nvSpPr>
-        <p:spPr/>
-        <p:txBody>
-          <a:bodyPr/>
-          <a:lstStyle/>
-          <a:p>
-            <a:r>
-              <a:t>3 minutos. Sin apuntes. Es para recordar, no cuenta para nota.</a:t>
-            </a:r>
-          </a:p>
-        </p:txBody>
-      </p:sp>
-      <p:sp>
-        <p:nvSpPr>
-          <p:cNvPr id="4" name="Slide Number Placeholder 3"/>
-          <p:cNvSpPr>
-            <a:spLocks noGrp="1"/>
-          </p:cNvSpPr>
-          <p:nvPr>
-            <p:ph type="sldNum" idx="5" sz="quarter"/>
-          </p:nvPr>
-        </p:nvSpPr>
-        <p:spPr/>
-      </p:sp>
-    </p:spTree>
-  </p:cSld>
-  <p:clrMapOvr>
-    <a:masterClrMapping/>
-  </p:clrMapOvr>
-</p:notes>
-</file>
-
-<file path=ppt/notesSlides/notesSlide2.xml><?xml version="1.0" encoding="utf-8"?>
-<p:notes xmlns:a="http://schemas.openxmlformats.org/drawingml/2006/main" xmlns:p="http://schemas.openxmlformats.org/presentationml/2006/main" xmlns:r="http://schemas.openxmlformats.org/officeDocument/2006/relationships">
-  <p:cSld>
-    <p:spTree>
-      <p:nvGrpSpPr>
-        <p:cNvPr id="1" name=""/>
-        <p:cNvGrpSpPr/>
-        <p:nvPr/>
-      </p:nvGrpSpPr>
-      <p:grpSpPr>
-        <a:xfrm>
-          <a:off x="0" y="0"/>
-          <a:ext cx="0" cy="0"/>
-          <a:chOff x="0" y="0"/>
-          <a:chExt cx="0" cy="0"/>
-        </a:xfrm>
-      </p:grpSpPr>
-      <p:sp>
-        <p:nvSpPr>
-          <p:cNvPr id="2" name="Slide Image Placeholder 1"/>
-          <p:cNvSpPr>
-            <a:spLocks noGrp="1"/>
-          </p:cNvSpPr>
-          <p:nvPr>
-            <p:ph type="sldImg" idx="2"/>
-          </p:nvPr>
-        </p:nvSpPr>
-        <p:spPr/>
-      </p:sp>
-      <p:sp>
-        <p:nvSpPr>
-          <p:cNvPr id="3" name="Notes Placeholder 2"/>
-          <p:cNvSpPr>
-            <a:spLocks noGrp="1"/>
-          </p:cNvSpPr>
-          <p:nvPr>
-            <p:ph type="body" idx="3" sz="quarter"/>
-          </p:nvPr>
-        </p:nvSpPr>
-        <p:spPr/>
-        <p:txBody>
-          <a:bodyPr/>
-          <a:lstStyle/>
-          <a:p>
-            <a:r>
-              <a:t>3 minutos. Sin apuntes. Es para recordar, no cuenta para nota.</a:t>
-            </a:r>
-          </a:p>
-        </p:txBody>
-      </p:sp>
-      <p:sp>
-        <p:nvSpPr>
-          <p:cNvPr id="4" name="Slide Number Placeholder 3"/>
-          <p:cNvSpPr>
-            <a:spLocks noGrp="1"/>
-          </p:cNvSpPr>
-          <p:nvPr>
-            <p:ph type="sldNum" idx="5" sz="quarter"/>
-          </p:nvPr>
-        </p:nvSpPr>
-        <p:spPr/>
-      </p:sp>
-    </p:spTree>
-  </p:cSld>
-  <p:clrMapOvr>
-    <a:masterClrMapping/>
-  </p:clrMapOvr>
-</p:notes>
-</file>
-
-<file path=ppt/notesSlides/notesSlide3.xml><?xml version="1.0" encoding="utf-8"?>
-<p:notes xmlns:a="http://schemas.openxmlformats.org/drawingml/2006/main" xmlns:p="http://schemas.openxmlformats.org/presentationml/2006/main" xmlns:r="http://schemas.openxmlformats.org/officeDocument/2006/relationships">
-  <p:cSld>
-    <p:spTree>
-      <p:nvGrpSpPr>
-        <p:cNvPr id="1" name=""/>
-        <p:cNvGrpSpPr/>
-        <p:nvPr/>
-      </p:nvGrpSpPr>
-      <p:grpSpPr>
-        <a:xfrm>
-          <a:off x="0" y="0"/>
-          <a:ext cx="0" cy="0"/>
-          <a:chOff x="0" y="0"/>
-          <a:chExt cx="0" cy="0"/>
-        </a:xfrm>
-      </p:grpSpPr>
-      <p:sp>
-        <p:nvSpPr>
-          <p:cNvPr id="2" name="Slide Image Placeholder 1"/>
-          <p:cNvSpPr>
-            <a:spLocks noGrp="1"/>
-          </p:cNvSpPr>
-          <p:nvPr>
-            <p:ph type="sldImg" idx="2"/>
-          </p:nvPr>
-        </p:nvSpPr>
-        <p:spPr/>
-      </p:sp>
-      <p:sp>
-        <p:nvSpPr>
-          <p:cNvPr id="3" name="Notes Placeholder 2"/>
-          <p:cNvSpPr>
-            <a:spLocks noGrp="1"/>
-          </p:cNvSpPr>
-          <p:nvPr>
-            <p:ph type="body" idx="3" sz="quarter"/>
-          </p:nvPr>
-        </p:nvSpPr>
-        <p:spPr/>
-        <p:txBody>
-          <a:bodyPr/>
-          <a:lstStyle/>
-          <a:p>
-            <a:r>
-              <a:t>Nadie tiene que contestar: solo pensarlo.</a:t>
-            </a:r>
-          </a:p>
-        </p:txBody>
-      </p:sp>
-      <p:sp>
-        <p:nvSpPr>
-          <p:cNvPr id="4" name="Slide Number Placeholder 3"/>
-          <p:cNvSpPr>
-            <a:spLocks noGrp="1"/>
-          </p:cNvSpPr>
-          <p:nvPr>
-            <p:ph type="sldNum" idx="5" sz="quarter"/>
-          </p:nvPr>
-        </p:nvSpPr>
-        <p:spPr/>
-      </p:sp>
-    </p:spTree>
-  </p:cSld>
-  <p:clrMapOvr>
-    <a:masterClrMapping/>
-  </p:clrMapOvr>
-</p:notes>
-</file>
-
-<file path=ppt/notesSlides/notesSlide4.xml><?xml version="1.0" encoding="utf-8"?>
-<p:notes xmlns:a="http://schemas.openxmlformats.org/drawingml/2006/main" xmlns:p="http://schemas.openxmlformats.org/presentationml/2006/main" xmlns:r="http://schemas.openxmlformats.org/officeDocument/2006/relationships">
-  <p:cSld>
-    <p:spTree>
-      <p:nvGrpSpPr>
-        <p:cNvPr id="1" name=""/>
-        <p:cNvGrpSpPr/>
-        <p:nvPr/>
-      </p:nvGrpSpPr>
-      <p:grpSpPr>
-        <a:xfrm>
-          <a:off x="0" y="0"/>
-          <a:ext cx="0" cy="0"/>
-          <a:chOff x="0" y="0"/>
-          <a:chExt cx="0" cy="0"/>
-        </a:xfrm>
-      </p:grpSpPr>
-      <p:sp>
-        <p:nvSpPr>
-          <p:cNvPr id="2" name="Slide Image Placeholder 1"/>
-          <p:cNvSpPr>
-            <a:spLocks noGrp="1"/>
-          </p:cNvSpPr>
-          <p:nvPr>
-            <p:ph type="sldImg" idx="2"/>
-          </p:nvPr>
-        </p:nvSpPr>
-        <p:spPr/>
-      </p:sp>
-      <p:sp>
-        <p:nvSpPr>
-          <p:cNvPr id="3" name="Notes Placeholder 2"/>
-          <p:cNvSpPr>
-            <a:spLocks noGrp="1"/>
-          </p:cNvSpPr>
-          <p:nvPr>
-            <p:ph type="body" idx="3" sz="quarter"/>
-          </p:nvPr>
-        </p:nvSpPr>
-        <p:spPr/>
-        <p:txBody>
-          <a:bodyPr/>
-          <a:lstStyle/>
-          <a:p>
-            <a:r>
-              <a:t>Dejar unos segundos para que piensen la respuesta fácil antes de enseñar los pasos.</a:t>
-            </a:r>
-          </a:p>
-        </p:txBody>
-      </p:sp>
-      <p:sp>
-        <p:nvSpPr>
-          <p:cNvPr id="4" name="Slide Number Placeholder 3"/>
-          <p:cNvSpPr>
-            <a:spLocks noGrp="1"/>
-          </p:cNvSpPr>
-          <p:nvPr>
-            <p:ph type="sldNum" idx="5" sz="quarter"/>
-          </p:nvPr>
-        </p:nvSpPr>
-        <p:spPr/>
-      </p:sp>
-    </p:spTree>
-  </p:cSld>
-  <p:clrMapOvr>
-    <a:masterClrMapping/>
-  </p:clrMapOvr>
-</p:notes>
-</file>
-
-<file path=ppt/notesSlides/notesSlide5.xml><?xml version="1.0" encoding="utf-8"?>
-<p:notes xmlns:a="http://schemas.openxmlformats.org/drawingml/2006/main" xmlns:p="http://schemas.openxmlformats.org/presentationml/2006/main" xmlns:r="http://schemas.openxmlformats.org/officeDocument/2006/relationships">
-  <p:cSld>
-    <p:spTree>
-      <p:nvGrpSpPr>
-        <p:cNvPr id="1" name=""/>
-        <p:cNvGrpSpPr/>
-        <p:nvPr/>
-      </p:nvGrpSpPr>
-      <p:grpSpPr>
-        <a:xfrm>
-          <a:off x="0" y="0"/>
-          <a:ext cx="0" cy="0"/>
-          <a:chOff x="0" y="0"/>
-          <a:chExt cx="0" cy="0"/>
-        </a:xfrm>
-      </p:grpSpPr>
-      <p:sp>
-        <p:nvSpPr>
-          <p:cNvPr id="2" name="Slide Image Placeholder 1"/>
-          <p:cNvSpPr>
-            <a:spLocks noGrp="1"/>
-          </p:cNvSpPr>
-          <p:nvPr>
-            <p:ph type="sldImg" idx="2"/>
-          </p:nvPr>
-        </p:nvSpPr>
-        <p:spPr/>
-      </p:sp>
-      <p:sp>
-        <p:nvSpPr>
-          <p:cNvPr id="3" name="Notes Placeholder 2"/>
-          <p:cNvSpPr>
-            <a:spLocks noGrp="1"/>
-          </p:cNvSpPr>
-          <p:nvPr>
-            <p:ph type="body" idx="3" sz="quarter"/>
-          </p:nvPr>
-        </p:nvSpPr>
-        <p:spPr/>
-        <p:txBody>
-          <a:bodyPr/>
-          <a:lstStyle/>
-          <a:p>
-            <a:r>
-              <a:t>Dejar 2 minutos para que lo escriban. La diapositiva siguiente muestra el resumen.</a:t>
-            </a:r>
-          </a:p>
-        </p:txBody>
-      </p:sp>
-      <p:sp>
-        <p:nvSpPr>
-          <p:cNvPr id="4" name="Slide Number Placeholder 3"/>
-          <p:cNvSpPr>
-            <a:spLocks noGrp="1"/>
-          </p:cNvSpPr>
-          <p:nvPr>
-            <p:ph type="sldNum" idx="5" sz="quarter"/>
-          </p:nvPr>
-        </p:nvSpPr>
-        <p:spPr/>
-      </p:sp>
-    </p:spTree>
-  </p:cSld>
-  <p:clrMapOvr>
-    <a:masterClrMapping/>
-  </p:clrMapOvr>
-</p:notes>
-</file>
-
-<file path=ppt/notesSlides/notesSlide6.xml><?xml version="1.0" encoding="utf-8"?>
-<p:notes xmlns:a="http://schemas.openxmlformats.org/drawingml/2006/main" xmlns:p="http://schemas.openxmlformats.org/presentationml/2006/main" xmlns:r="http://schemas.openxmlformats.org/officeDocument/2006/relationships">
-  <p:cSld>
-    <p:spTree>
-      <p:nvGrpSpPr>
-        <p:cNvPr id="1" name=""/>
-        <p:cNvGrpSpPr/>
-        <p:nvPr/>
-      </p:nvGrpSpPr>
-      <p:grpSpPr>
-        <a:xfrm>
-          <a:off x="0" y="0"/>
-          <a:ext cx="0" cy="0"/>
-          <a:chOff x="0" y="0"/>
-          <a:chExt cx="0" cy="0"/>
-        </a:xfrm>
-      </p:grpSpPr>
-      <p:sp>
-        <p:nvSpPr>
-          <p:cNvPr id="2" name="Slide Image Placeholder 1"/>
-          <p:cNvSpPr>
-            <a:spLocks noGrp="1"/>
-          </p:cNvSpPr>
-          <p:nvPr>
-            <p:ph type="sldImg" idx="2"/>
-          </p:nvPr>
-        </p:nvSpPr>
-        <p:spPr/>
-      </p:sp>
-      <p:sp>
-        <p:nvSpPr>
-          <p:cNvPr id="3" name="Notes Placeholder 2"/>
-          <p:cNvSpPr>
-            <a:spLocks noGrp="1"/>
-          </p:cNvSpPr>
-          <p:nvPr>
-            <p:ph type="body" idx="3" sz="quarter"/>
-          </p:nvPr>
-        </p:nvSpPr>
-        <p:spPr/>
-        <p:txBody>
-          <a:bodyPr/>
-          <a:lstStyle/>
-          <a:p>
-            <a:r>
-              <a:t>Buscar: «cuándo confiar en un experto» · «consenso científico qué es»</a:t>
-            </a:r>
-          </a:p>
-        </p:txBody>
-      </p:sp>
-      <p:sp>
-        <p:nvSpPr>
-          <p:cNvPr id="4" name="Slide Number Placeholder 3"/>
-          <p:cNvSpPr>
-            <a:spLocks noGrp="1"/>
-          </p:cNvSpPr>
-          <p:nvPr>
-            <p:ph type="sldNum" idx="5" sz="quarter"/>
-          </p:nvPr>
-        </p:nvSpPr>
-        <p:spPr/>
-      </p:sp>
-    </p:spTree>
-  </p:cSld>
-  <p:clrMapOvr>
-    <a:masterClrMapping/>
-  </p:clrMapOvr>
-</p:notes>
 </file>
 
 <file path=ppt/slideLayouts/slideLayout1.xml><?xml version="1.0" encoding="utf-8"?>

--- a/curso/pptx/S26.pptx
+++ b/curso/pptx/S26.pptx
@@ -4417,7 +4417,7 @@
                 </a:solidFill>
                 <a:latin typeface="Nunito Sans"/>
               </a:rPr>
-              <a:t>El pediatra de Omar le recomienda una vacuna. Lo mismo dicen Sanidad y casi todos los médicos.</a:t>
+              <a:t>El pediatra de un chico le recomienda una vacuna. Lo mismo dicen Sanidad y casi todos los médicos.</a:t>
             </a:r>
           </a:p>
         </p:txBody>

--- a/curso/pptx/S26.pptx
+++ b/curso/pptx/S26.pptx
@@ -22,6 +22,7 @@
     <p:sldId id="270" r:id="rId22"/>
     <p:sldId id="271" r:id="rId23"/>
     <p:sldId id="272" r:id="rId24"/>
+    <p:sldId id="273" r:id="rId25"/>
   </p:sldIdLst>
   <p:sldSz cx="12192000" cy="6858000" type="screen4x3"/>
   <p:notesSz cx="6858000" cy="9144000"/>
@@ -3535,7 +3536,7 @@
                 </a:solidFill>
                 <a:latin typeface="Nunito Sans"/>
               </a:rPr>
-              <a:t>PENSAMIENTO CRÍTICO · SESIÓN 26 · UNIDAD 5 · AUTORIDAD E INFLUENCIA</a:t>
+              <a:t>PENSAMIENTO CRÍTICO · SESIÓN 26 · UNIDAD 5 · FALACIAS II: RAZONAR MAL</a:t>
             </a:r>
           </a:p>
         </p:txBody>
@@ -3574,7 +3575,7 @@
                 </a:solidFill>
                 <a:latin typeface="Fredoka"/>
               </a:rPr>
-              <a:t>¿Cuándo fiarse de un experto?</a:t>
+              <a:t>Falso dilema</a:t>
             </a:r>
           </a:p>
         </p:txBody>
@@ -3613,7 +3614,7 @@
                 </a:solidFill>
                 <a:latin typeface="Nunito Sans"/>
               </a:rPr>
-              <a:t>Antes de fiarte de un experto, mira cuatro cosas: su campo, el consenso, sus intereses y sus pruebas.</a:t>
+              <a:t>El falso dilema presenta solo dos opciones, como si fueran las únicas, cuando en realidad hay más salidas.</a:t>
             </a:r>
           </a:p>
         </p:txBody>
@@ -3717,7 +3718,7 @@
                 </a:solidFill>
                 <a:latin typeface="Fredoka"/>
               </a:rPr>
-              <a:t>Caso 1 · La dentista de Instagram</a:t>
+              <a:t>Caso 2 · En casa</a:t>
             </a:r>
           </a:p>
         </p:txBody>
@@ -3799,7 +3800,7 @@
                 </a:solidFill>
                 <a:latin typeface="Nunito Sans"/>
               </a:rPr>
-              <a:t>Una dentista dice en Instagram que un dentífrico es «el mejor del mundo». Debajo pone: «colaboración pagada».</a:t>
+              <a:t>El padre de un chico: «O dejas los videojuegos para siempre, o vas a suspender todo».</a:t>
             </a:r>
           </a:p>
         </p:txBody>
@@ -3847,7 +3848,7 @@
                 </a:solidFill>
                 <a:latin typeface="Nunito Sans"/>
               </a:rPr>
-              <a:t>¿Su campo? Sí: es dentista y habla de dientes.</a:t>
+              <a:t>¿Qué dos opciones? Dejarlos para siempre o suspenderlo todo.</a:t>
             </a:r>
           </a:p>
           <a:p>
@@ -3872,7 +3873,7 @@
                 </a:solidFill>
                 <a:latin typeface="Nunito Sans"/>
               </a:rPr>
-              <a:t>¿Sus intereses? Le pagan por decirlo. No quiere decir que mienta, pero hay que mirar con más cuidado.</a:t>
+              <a:t>¿Tercera opción? Jugar menos: una hora, solo el fin de semana, después de estudiar.</a:t>
             </a:r>
           </a:p>
           <a:p>
@@ -3897,7 +3898,7 @@
                 </a:solidFill>
                 <a:latin typeface="Nunito Sans"/>
               </a:rPr>
-              <a:t>¿Sus pruebas? No dice cómo lo sabe. «El mejor del mundo» no se puede medir así.</a:t>
+              <a:t>¿La preocupación es real? Puede que sí: si juega mucho, estudia menos.</a:t>
             </a:r>
           </a:p>
           <a:p>
@@ -3922,7 +3923,7 @@
                 </a:solidFill>
                 <a:latin typeface="Nunito Sans"/>
               </a:rPr>
-              <a:t>Conclusión: sabe del tema, pero tiene un interés. Mejor preguntar a una dentista que no cobre por anunciarlo.</a:t>
+              <a:t>Conclusión: falso dilema. El problema puede ser real; lo falso es que solo haya dos salidas.</a:t>
             </a:r>
           </a:p>
         </p:txBody>
@@ -4026,7 +4027,7 @@
                 </a:solidFill>
                 <a:latin typeface="Fredoka"/>
               </a:rPr>
-              <a:t>Caso 2 · Un genio fuera de su campo</a:t>
+              <a:t>Caso 3 · Un dilema de verdad</a:t>
             </a:r>
           </a:p>
         </p:txBody>
@@ -4108,7 +4109,7 @@
                 </a:solidFill>
                 <a:latin typeface="Nunito Sans"/>
               </a:rPr>
-              <a:t>Imagina que un premio Nobel de Física dice en una entrevista que comer ajo crudo cura el resfriado.</a:t>
+              <a:t>Una chica tiene entrada para un concierto y para un partido. Los dos son el sábado a las seis, en sitios distintos de Bilbao.</a:t>
             </a:r>
           </a:p>
         </p:txBody>
@@ -4156,7 +4157,7 @@
                 </a:solidFill>
                 <a:latin typeface="Nunito Sans"/>
               </a:rPr>
-              <a:t>¿Su campo? No: sabe muchísimo de física, no de medicina.</a:t>
+              <a:t>¿Qué dos opciones tiene? El concierto o el partido.</a:t>
             </a:r>
           </a:p>
           <a:p>
@@ -4181,7 +4182,7 @@
                 </a:solidFill>
                 <a:latin typeface="Nunito Sans"/>
               </a:rPr>
-              <a:t>¿El consenso? Los médicos no dicen que el ajo cure el resfriado.</a:t>
+              <a:t>¿Puede ir a los dos? No: es a la misma hora y en sitios distintos.</a:t>
             </a:r>
           </a:p>
           <a:p>
@@ -4206,7 +4207,7 @@
                 </a:solidFill>
                 <a:latin typeface="Nunito Sans"/>
               </a:rPr>
-              <a:t>¿Sus pruebas? No da ninguna: solo su opinión.</a:t>
+              <a:t>Podría no ir a ninguno, pero no puede tener los dos: elegir una opción le impide la otra.</a:t>
             </a:r>
           </a:p>
           <a:p>
@@ -4231,7 +4232,7 @@
                 </a:solidFill>
                 <a:latin typeface="Nunito Sans"/>
               </a:rPr>
-              <a:t>Conclusión: es un gran experto, pero no en esto. En este tema, su palabra no vale más que la de cualquiera.</a:t>
+              <a:t>Conclusión: no es falso dilema. A veces solo hay dos opciones de verdad.</a:t>
             </a:r>
           </a:p>
         </p:txBody>
@@ -4245,315 +4246,6 @@
 </file>
 
 <file path=ppt/slides/slide12.xml><?xml version="1.0" encoding="utf-8"?>
-<p:sld xmlns:a="http://schemas.openxmlformats.org/drawingml/2006/main" xmlns:p="http://schemas.openxmlformats.org/presentationml/2006/main" xmlns:r="http://schemas.openxmlformats.org/officeDocument/2006/relationships">
-  <p:cSld>
-    <p:bg>
-      <p:bgPr>
-        <a:solidFill>
-          <a:srgbClr val="FBF7EF"/>
-        </a:solidFill>
-        <a:effectLst/>
-      </p:bgPr>
-    </p:bg>
-    <p:spTree>
-      <p:nvGrpSpPr>
-        <p:cNvPr id="1" name=""/>
-        <p:cNvGrpSpPr/>
-        <p:nvPr/>
-      </p:nvGrpSpPr>
-      <p:grpSpPr/>
-      <p:sp>
-        <p:nvSpPr>
-          <p:cNvPr id="2" name="TextBox 1"/>
-          <p:cNvSpPr txBox="1"/>
-          <p:nvPr/>
-        </p:nvSpPr>
-        <p:spPr>
-          <a:xfrm>
-            <a:off x="640000" y="380000"/>
-            <a:ext cx="10912000" cy="420000"/>
-          </a:xfrm>
-          <a:prstGeom prst="rect">
-            <a:avLst/>
-          </a:prstGeom>
-          <a:noFill/>
-        </p:spPr>
-        <p:txBody>
-          <a:bodyPr wrap="square">
-            <a:spAutoFit/>
-          </a:bodyPr>
-          <a:lstStyle/>
-          <a:p>
-            <a:pPr>
-              <a:spcAft>
-                <a:spcPts val="630"/>
-              </a:spcAft>
-            </a:pPr>
-            <a:r>
-              <a:rPr sz="1400" b="1">
-                <a:solidFill>
-                  <a:srgbClr val="E8793A"/>
-                </a:solidFill>
-                <a:latin typeface="Nunito Sans"/>
-              </a:rPr>
-              <a:t>BLOQUE 2 · CASOS RESUELTOS</a:t>
-            </a:r>
-          </a:p>
-        </p:txBody>
-      </p:sp>
-      <p:sp>
-        <p:nvSpPr>
-          <p:cNvPr id="3" name="TextBox 2"/>
-          <p:cNvSpPr txBox="1"/>
-          <p:nvPr/>
-        </p:nvSpPr>
-        <p:spPr>
-          <a:xfrm>
-            <a:off x="640000" y="760000"/>
-            <a:ext cx="10912000" cy="800000"/>
-          </a:xfrm>
-          <a:prstGeom prst="rect">
-            <a:avLst/>
-          </a:prstGeom>
-          <a:noFill/>
-        </p:spPr>
-        <p:txBody>
-          <a:bodyPr wrap="square">
-            <a:spAutoFit/>
-          </a:bodyPr>
-          <a:lstStyle/>
-          <a:p>
-            <a:pPr>
-              <a:spcAft>
-                <a:spcPts val="1710"/>
-              </a:spcAft>
-            </a:pPr>
-            <a:r>
-              <a:rPr sz="3800" b="1">
-                <a:solidFill>
-                  <a:srgbClr val="1F2A44"/>
-                </a:solidFill>
-                <a:latin typeface="Fredoka"/>
-              </a:rPr>
-              <a:t>Caso 3 · La vacuna</a:t>
-            </a:r>
-          </a:p>
-        </p:txBody>
-      </p:sp>
-      <p:sp>
-        <p:nvSpPr>
-          <p:cNvPr id="4" name="Rectangle 3"/>
-          <p:cNvSpPr/>
-          <p:nvPr/>
-        </p:nvSpPr>
-        <p:spPr>
-          <a:xfrm>
-            <a:off x="640000" y="1600000"/>
-            <a:ext cx="10912000" cy="1100000"/>
-          </a:xfrm>
-          <a:prstGeom prst="rect">
-            <a:avLst/>
-          </a:prstGeom>
-          <a:solidFill>
-            <a:srgbClr val="FFFFFF"/>
-          </a:solidFill>
-          <a:ln>
-            <a:noFill/>
-          </a:ln>
-        </p:spPr>
-        <p:style>
-          <a:lnRef idx="1">
-            <a:schemeClr val="accent1"/>
-          </a:lnRef>
-          <a:fillRef idx="3">
-            <a:schemeClr val="accent1"/>
-          </a:fillRef>
-          <a:effectRef idx="2">
-            <a:schemeClr val="accent1"/>
-          </a:effectRef>
-          <a:fontRef idx="minor">
-            <a:schemeClr val="lt1"/>
-          </a:fontRef>
-        </p:style>
-        <p:txBody>
-          <a:bodyPr rtlCol="0" anchor="ctr"/>
-          <a:lstStyle/>
-          <a:p>
-            <a:pPr algn="ctr"/>
-          </a:p>
-        </p:txBody>
-      </p:sp>
-      <p:sp>
-        <p:nvSpPr>
-          <p:cNvPr id="5" name="TextBox 4"/>
-          <p:cNvSpPr txBox="1"/>
-          <p:nvPr/>
-        </p:nvSpPr>
-        <p:spPr>
-          <a:xfrm>
-            <a:off x="840000" y="1650000"/>
-            <a:ext cx="10512000" cy="1000000"/>
-          </a:xfrm>
-          <a:prstGeom prst="rect">
-            <a:avLst/>
-          </a:prstGeom>
-          <a:noFill/>
-        </p:spPr>
-        <p:txBody>
-          <a:bodyPr wrap="square" anchor="ctr">
-            <a:spAutoFit/>
-          </a:bodyPr>
-          <a:lstStyle/>
-          <a:p>
-            <a:pPr>
-              <a:spcAft>
-                <a:spcPts val="1170"/>
-              </a:spcAft>
-            </a:pPr>
-            <a:r>
-              <a:rPr sz="2600" b="1">
-                <a:solidFill>
-                  <a:srgbClr val="1F2A44"/>
-                </a:solidFill>
-                <a:latin typeface="Nunito Sans"/>
-              </a:rPr>
-              <a:t>El pediatra de un chico le recomienda una vacuna. Lo mismo dicen Sanidad y casi todos los médicos.</a:t>
-            </a:r>
-          </a:p>
-        </p:txBody>
-      </p:sp>
-      <p:sp>
-        <p:nvSpPr>
-          <p:cNvPr id="6" name="TextBox 5"/>
-          <p:cNvSpPr txBox="1"/>
-          <p:nvPr/>
-        </p:nvSpPr>
-        <p:spPr>
-          <a:xfrm>
-            <a:off x="640000" y="2900000"/>
-            <a:ext cx="10912000" cy="3500000"/>
-          </a:xfrm>
-          <a:prstGeom prst="rect">
-            <a:avLst/>
-          </a:prstGeom>
-          <a:noFill/>
-        </p:spPr>
-        <p:txBody>
-          <a:bodyPr wrap="square">
-            <a:spAutoFit/>
-          </a:bodyPr>
-          <a:lstStyle/>
-          <a:p>
-            <a:pPr>
-              <a:spcAft>
-                <a:spcPts val="1080"/>
-              </a:spcAft>
-            </a:pPr>
-            <a:r>
-              <a:rPr sz="2400" b="1">
-                <a:solidFill>
-                  <a:srgbClr val="E8793A"/>
-                </a:solidFill>
-                <a:latin typeface="Nunito Sans"/>
-              </a:rPr>
-              <a:t>1. </a:t>
-            </a:r>
-            <a:r>
-              <a:rPr sz="2400" b="0">
-                <a:solidFill>
-                  <a:srgbClr val="1F2A44"/>
-                </a:solidFill>
-                <a:latin typeface="Nunito Sans"/>
-              </a:rPr>
-              <a:t>¿Su campo? Sí: es médico de niños y habla de salud.</a:t>
-            </a:r>
-          </a:p>
-          <a:p>
-            <a:pPr>
-              <a:spcAft>
-                <a:spcPts val="1080"/>
-              </a:spcAft>
-            </a:pPr>
-            <a:r>
-              <a:rPr sz="2400" b="1">
-                <a:solidFill>
-                  <a:srgbClr val="E8793A"/>
-                </a:solidFill>
-                <a:latin typeface="Nunito Sans"/>
-              </a:rPr>
-              <a:t>2. </a:t>
-            </a:r>
-            <a:r>
-              <a:rPr sz="2400" b="0">
-                <a:solidFill>
-                  <a:srgbClr val="1F2A44"/>
-                </a:solidFill>
-                <a:latin typeface="Nunito Sans"/>
-              </a:rPr>
-              <a:t>¿El consenso? Sí: casi todos los expertos dicen lo mismo.</a:t>
-            </a:r>
-          </a:p>
-          <a:p>
-            <a:pPr>
-              <a:spcAft>
-                <a:spcPts val="1080"/>
-              </a:spcAft>
-            </a:pPr>
-            <a:r>
-              <a:rPr sz="2400" b="1">
-                <a:solidFill>
-                  <a:srgbClr val="E8793A"/>
-                </a:solidFill>
-                <a:latin typeface="Nunito Sans"/>
-              </a:rPr>
-              <a:t>3. </a:t>
-            </a:r>
-            <a:r>
-              <a:rPr sz="2400" b="0">
-                <a:solidFill>
-                  <a:srgbClr val="1F2A44"/>
-                </a:solidFill>
-                <a:latin typeface="Nunito Sans"/>
-              </a:rPr>
-              <a:t>¿Sus intereses y pruebas? No cobra más por recomendarla, y hay muchos estudios detrás.</a:t>
-            </a:r>
-          </a:p>
-          <a:p>
-            <a:pPr>
-              <a:spcAft>
-                <a:spcPts val="1080"/>
-              </a:spcAft>
-            </a:pPr>
-            <a:r>
-              <a:rPr sz="2400" b="1">
-                <a:solidFill>
-                  <a:srgbClr val="E8793A"/>
-                </a:solidFill>
-                <a:latin typeface="Nunito Sans"/>
-              </a:rPr>
-              <a:t>4. </a:t>
-            </a:r>
-            <a:r>
-              <a:rPr sz="2400" b="0">
-                <a:solidFill>
-                  <a:srgbClr val="1F2A44"/>
-                </a:solidFill>
-                <a:latin typeface="Nunito Sans"/>
-              </a:rPr>
-              <a:t>Conclusión: pasa las cuatro preguntas. Fiarse aquí es razonable.</a:t>
-            </a:r>
-          </a:p>
-        </p:txBody>
-      </p:sp>
-    </p:spTree>
-  </p:cSld>
-  <p:clrMapOvr>
-    <a:masterClrMapping/>
-  </p:clrMapOvr>
-</p:sld>
-</file>
-
-<file path=ppt/slides/slide13.xml><?xml version="1.0" encoding="utf-8"?>
 <p:sld xmlns:a="http://schemas.openxmlformats.org/drawingml/2006/main" xmlns:p="http://schemas.openxmlformats.org/presentationml/2006/main" xmlns:r="http://schemas.openxmlformats.org/officeDocument/2006/relationships">
   <p:cSld>
     <p:bg>
@@ -4644,7 +4336,7 @@
                 </a:solidFill>
                 <a:latin typeface="Fredoka"/>
               </a:rPr>
-              <a:t>⚠ Contra el consenso</a:t>
+              <a:t>⚠ ¿Gol o no gol?</a:t>
             </a:r>
           </a:p>
         </p:txBody>
@@ -4726,7 +4418,7 @@
                 </a:solidFill>
                 <a:latin typeface="Nunito Sans"/>
               </a:rPr>
-              <a:t>Años 80: casi todos los médicos creen que las úlceras de estómago vienen del estrés. Barry Marshall dice que las causa una bacteria.</a:t>
+              <a:t>El VAR revisa una jugada: «O el balón ha cruzado entera la línea, o no la ha cruzado». Un chico: «¡Falso dilema! Solo da dos opciones».</a:t>
             </a:r>
           </a:p>
         </p:txBody>
@@ -4774,7 +4466,7 @@
                 </a:solidFill>
                 <a:latin typeface="Nunito Sans"/>
               </a:rPr>
-              <a:t>Va contra el consenso… ¿entonces seguro que se equivoca?</a:t>
+              <a:t>Tiene la forma «o… o…». ¿Tiene razón ese chico?</a:t>
             </a:r>
           </a:p>
           <a:p>
@@ -4799,7 +4491,7 @@
                 </a:solidFill>
                 <a:latin typeface="Nunito Sans"/>
               </a:rPr>
-              <a:t>Casi siempre, quien va contra el consenso se equivoca. Pero no siempre.</a:t>
+              <a:t>Parece que sí: solo hay dos opciones y suena a «o… o…».</a:t>
             </a:r>
           </a:p>
           <a:p>
@@ -4824,7 +4516,7 @@
                 </a:solidFill>
                 <a:latin typeface="Nunito Sans"/>
               </a:rPr>
-              <a:t>Marshall tenía pruebas: encontró la bacteria con Robin Warren. Él mismo se la bebió para demostrarlo.</a:t>
+              <a:t>Busca la tercera: ¿medio gol? No existe. Si no ha cruzado entera, no ha cruzado.</a:t>
             </a:r>
           </a:p>
           <a:p>
@@ -4849,7 +4541,7 @@
                 </a:solidFill>
                 <a:latin typeface="Nunito Sans"/>
               </a:rPr>
-              <a:t>Otros comprobaron sus pruebas y el consenso cambió. En 2005 les dieron el Nobel.</a:t>
+              <a:t>Cuando una opción es justo lo contrario de la otra («sí / no»), no queda sitio para una tercera.</a:t>
             </a:r>
           </a:p>
           <a:p>
@@ -4874,7 +4566,111 @@
                 </a:solidFill>
                 <a:latin typeface="Nunito Sans"/>
               </a:rPr>
-              <a:t>Conclusión: el consenso es una muy buena razón, pero no es infalible. Lo que lo cambia son pruebas, no opiniones.</a:t>
+              <a:t>Conclusión: no es falacia. El «o… o…» es una pista; lo que cuenta es si de verdad hay más opciones.</a:t>
+            </a:r>
+          </a:p>
+        </p:txBody>
+      </p:sp>
+    </p:spTree>
+  </p:cSld>
+  <p:clrMapOvr>
+    <a:masterClrMapping/>
+  </p:clrMapOvr>
+</p:sld>
+</file>
+
+<file path=ppt/slides/slide13.xml><?xml version="1.0" encoding="utf-8"?>
+<p:sld xmlns:a="http://schemas.openxmlformats.org/drawingml/2006/main" xmlns:p="http://schemas.openxmlformats.org/presentationml/2006/main" xmlns:r="http://schemas.openxmlformats.org/officeDocument/2006/relationships">
+  <p:cSld>
+    <p:bg>
+      <p:bgPr>
+        <a:solidFill>
+          <a:srgbClr val="1F2A44"/>
+        </a:solidFill>
+        <a:effectLst/>
+      </p:bgPr>
+    </p:bg>
+    <p:spTree>
+      <p:nvGrpSpPr>
+        <p:cNvPr id="1" name=""/>
+        <p:cNvGrpSpPr/>
+        <p:nvPr/>
+      </p:nvGrpSpPr>
+      <p:grpSpPr/>
+      <p:sp>
+        <p:nvSpPr>
+          <p:cNvPr id="2" name="TextBox 1"/>
+          <p:cNvSpPr txBox="1"/>
+          <p:nvPr/>
+        </p:nvSpPr>
+        <p:spPr>
+          <a:xfrm>
+            <a:off x="640000" y="2300000"/>
+            <a:ext cx="10912000" cy="500000"/>
+          </a:xfrm>
+          <a:prstGeom prst="rect">
+            <a:avLst/>
+          </a:prstGeom>
+          <a:noFill/>
+        </p:spPr>
+        <p:txBody>
+          <a:bodyPr wrap="square">
+            <a:spAutoFit/>
+          </a:bodyPr>
+          <a:lstStyle/>
+          <a:p>
+            <a:pPr>
+              <a:spcAft>
+                <a:spcPts val="810"/>
+              </a:spcAft>
+            </a:pPr>
+            <a:r>
+              <a:rPr sz="1800" b="1">
+                <a:solidFill>
+                  <a:srgbClr val="F4B183"/>
+                </a:solidFill>
+                <a:latin typeface="Nunito Sans"/>
+              </a:rPr>
+              <a:t>BLOQUE 3</a:t>
+            </a:r>
+          </a:p>
+        </p:txBody>
+      </p:sp>
+      <p:sp>
+        <p:nvSpPr>
+          <p:cNvPr id="3" name="TextBox 2"/>
+          <p:cNvSpPr txBox="1"/>
+          <p:nvPr/>
+        </p:nvSpPr>
+        <p:spPr>
+          <a:xfrm>
+            <a:off x="640000" y="2800000"/>
+            <a:ext cx="10912000" cy="800000"/>
+          </a:xfrm>
+          <a:prstGeom prst="rect">
+            <a:avLst/>
+          </a:prstGeom>
+          <a:noFill/>
+        </p:spPr>
+        <p:txBody>
+          <a:bodyPr wrap="square">
+            <a:spAutoFit/>
+          </a:bodyPr>
+          <a:lstStyle/>
+          <a:p>
+            <a:pPr>
+              <a:spcAft>
+                <a:spcPts val="2160"/>
+              </a:spcAft>
+            </a:pPr>
+            <a:r>
+              <a:rPr sz="4800" b="1">
+                <a:solidFill>
+                  <a:srgbClr val="FBF7EF"/>
+                </a:solidFill>
+                <a:latin typeface="Fredoka"/>
+              </a:rPr>
+              <a:t>Dilema falso y dilema real</a:t>
             </a:r>
           </a:p>
         </p:txBody>
@@ -4939,7 +4735,7 @@
                 </a:solidFill>
                 <a:latin typeface="Nunito Sans"/>
               </a:rPr>
-              <a:t>LO DE HOY EN TRES LÍNEAS</a:t>
+              <a:t>BLOQUE 3 · DILEMA FALSO Y DILEMA REAL</a:t>
             </a:r>
           </a:p>
         </p:txBody>
@@ -4978,21 +4774,64 @@
                 </a:solidFill>
                 <a:latin typeface="Fredoka"/>
               </a:rPr>
-              <a:t>Escríbelo tú primero, sin mirar</a:t>
-            </a:r>
-          </a:p>
-        </p:txBody>
-      </p:sp>
-      <p:sp>
-        <p:nvSpPr>
-          <p:cNvPr id="4" name="TextBox 3"/>
+              <a:t>¿Falso o real?</a:t>
+            </a:r>
+          </a:p>
+        </p:txBody>
+      </p:sp>
+      <p:sp>
+        <p:nvSpPr>
+          <p:cNvPr id="4" name="Rectangle 3"/>
+          <p:cNvSpPr/>
+          <p:nvPr/>
+        </p:nvSpPr>
+        <p:spPr>
+          <a:xfrm>
+            <a:off x="640000" y="1650000"/>
+            <a:ext cx="5306000" cy="4400000"/>
+          </a:xfrm>
+          <a:prstGeom prst="rect">
+            <a:avLst/>
+          </a:prstGeom>
+          <a:solidFill>
+            <a:srgbClr val="FBE3D2"/>
+          </a:solidFill>
+          <a:ln>
+            <a:noFill/>
+          </a:ln>
+        </p:spPr>
+        <p:style>
+          <a:lnRef idx="1">
+            <a:schemeClr val="accent1"/>
+          </a:lnRef>
+          <a:fillRef idx="3">
+            <a:schemeClr val="accent1"/>
+          </a:fillRef>
+          <a:effectRef idx="2">
+            <a:schemeClr val="accent1"/>
+          </a:effectRef>
+          <a:fontRef idx="minor">
+            <a:schemeClr val="lt1"/>
+          </a:fontRef>
+        </p:style>
+        <p:txBody>
+          <a:bodyPr rtlCol="0" anchor="ctr"/>
+          <a:lstStyle/>
+          <a:p>
+            <a:pPr algn="ctr"/>
+          </a:p>
+        </p:txBody>
+      </p:sp>
+      <p:sp>
+        <p:nvSpPr>
+          <p:cNvPr id="5" name="TextBox 4"/>
           <p:cNvSpPr txBox="1"/>
           <p:nvPr/>
         </p:nvSpPr>
         <p:spPr>
           <a:xfrm>
-            <a:off x="640000" y="1800000"/>
-            <a:ext cx="10912000" cy="1500000"/>
+            <a:off x="840000" y="1750000"/>
+            <a:ext cx="4906000" cy="600000"/>
           </a:xfrm>
           <a:prstGeom prst="rect">
             <a:avLst/>
@@ -5007,17 +4846,295 @@
           <a:p>
             <a:pPr>
               <a:spcAft>
+                <a:spcPts val="1260"/>
+              </a:spcAft>
+            </a:pPr>
+            <a:r>
+              <a:rPr sz="2800" b="1">
+                <a:solidFill>
+                  <a:srgbClr val="C2531C"/>
+                </a:solidFill>
+                <a:latin typeface="Nunito Sans"/>
+              </a:rPr>
+              <a:t>Falso dilema</a:t>
+            </a:r>
+          </a:p>
+        </p:txBody>
+      </p:sp>
+      <p:sp>
+        <p:nvSpPr>
+          <p:cNvPr id="6" name="TextBox 5"/>
+          <p:cNvSpPr txBox="1"/>
+          <p:nvPr/>
+        </p:nvSpPr>
+        <p:spPr>
+          <a:xfrm>
+            <a:off x="840000" y="2400000"/>
+            <a:ext cx="4906000" cy="3500000"/>
+          </a:xfrm>
+          <a:prstGeom prst="rect">
+            <a:avLst/>
+          </a:prstGeom>
+          <a:noFill/>
+        </p:spPr>
+        <p:txBody>
+          <a:bodyPr wrap="square">
+            <a:spAutoFit/>
+          </a:bodyPr>
+          <a:lstStyle/>
+          <a:p>
+            <a:pPr>
+              <a:spcAft>
                 <a:spcPts val="1170"/>
               </a:spcAft>
             </a:pPr>
             <a:r>
+              <a:rPr sz="2600" b="1">
+                <a:solidFill>
+                  <a:srgbClr val="E8793A"/>
+                </a:solidFill>
+                <a:latin typeface="Nunito Sans"/>
+              </a:rPr>
+              <a:t>• </a:t>
+            </a:r>
+            <a:r>
               <a:rPr sz="2600" b="0">
                 <a:solidFill>
-                  <a:srgbClr val="4A5568"/>
-                </a:solidFill>
-                <a:latin typeface="Nunito Sans"/>
-              </a:rPr>
-              <a:t>Dos minutos. Después lo comparamos.</a:t>
+                  <a:srgbClr val="1F2A44"/>
+                </a:solidFill>
+                <a:latin typeface="Nunito Sans"/>
+              </a:rPr>
+              <a:t>«O todo o nada»</a:t>
+            </a:r>
+          </a:p>
+          <a:p>
+            <a:pPr>
+              <a:spcAft>
+                <a:spcPts val="1170"/>
+              </a:spcAft>
+            </a:pPr>
+            <a:r>
+              <a:rPr sz="2600" b="1">
+                <a:solidFill>
+                  <a:srgbClr val="E8793A"/>
+                </a:solidFill>
+                <a:latin typeface="Nunito Sans"/>
+              </a:rPr>
+              <a:t>• </a:t>
+            </a:r>
+            <a:r>
+              <a:rPr sz="2600" b="0">
+                <a:solidFill>
+                  <a:srgbClr val="1F2A44"/>
+                </a:solidFill>
+                <a:latin typeface="Nunito Sans"/>
+              </a:rPr>
+              <a:t>Esconde las opciones del medio</a:t>
+            </a:r>
+          </a:p>
+          <a:p>
+            <a:pPr>
+              <a:spcAft>
+                <a:spcPts val="1170"/>
+              </a:spcAft>
+            </a:pPr>
+            <a:r>
+              <a:rPr sz="2600" b="1">
+                <a:solidFill>
+                  <a:srgbClr val="E8793A"/>
+                </a:solidFill>
+                <a:latin typeface="Nunito Sans"/>
+              </a:rPr>
+              <a:t>• </a:t>
+            </a:r>
+            <a:r>
+              <a:rPr sz="2600" b="0">
+                <a:solidFill>
+                  <a:srgbClr val="1F2A44"/>
+                </a:solidFill>
+                <a:latin typeface="Nunito Sans"/>
+              </a:rPr>
+              <a:t>Te empuja hacia la opción que quiere el otro</a:t>
+            </a:r>
+          </a:p>
+        </p:txBody>
+      </p:sp>
+      <p:sp>
+        <p:nvSpPr>
+          <p:cNvPr id="7" name="Rectangle 6"/>
+          <p:cNvSpPr/>
+          <p:nvPr/>
+        </p:nvSpPr>
+        <p:spPr>
+          <a:xfrm>
+            <a:off x="6246000" y="1650000"/>
+            <a:ext cx="5306000" cy="4400000"/>
+          </a:xfrm>
+          <a:prstGeom prst="rect">
+            <a:avLst/>
+          </a:prstGeom>
+          <a:solidFill>
+            <a:srgbClr val="EAF0F7"/>
+          </a:solidFill>
+          <a:ln>
+            <a:noFill/>
+          </a:ln>
+        </p:spPr>
+        <p:style>
+          <a:lnRef idx="1">
+            <a:schemeClr val="accent1"/>
+          </a:lnRef>
+          <a:fillRef idx="3">
+            <a:schemeClr val="accent1"/>
+          </a:fillRef>
+          <a:effectRef idx="2">
+            <a:schemeClr val="accent1"/>
+          </a:effectRef>
+          <a:fontRef idx="minor">
+            <a:schemeClr val="lt1"/>
+          </a:fontRef>
+        </p:style>
+        <p:txBody>
+          <a:bodyPr rtlCol="0" anchor="ctr"/>
+          <a:lstStyle/>
+          <a:p>
+            <a:pPr algn="ctr"/>
+          </a:p>
+        </p:txBody>
+      </p:sp>
+      <p:sp>
+        <p:nvSpPr>
+          <p:cNvPr id="8" name="TextBox 7"/>
+          <p:cNvSpPr txBox="1"/>
+          <p:nvPr/>
+        </p:nvSpPr>
+        <p:spPr>
+          <a:xfrm>
+            <a:off x="6446000" y="1750000"/>
+            <a:ext cx="4906000" cy="600000"/>
+          </a:xfrm>
+          <a:prstGeom prst="rect">
+            <a:avLst/>
+          </a:prstGeom>
+          <a:noFill/>
+        </p:spPr>
+        <p:txBody>
+          <a:bodyPr wrap="square">
+            <a:spAutoFit/>
+          </a:bodyPr>
+          <a:lstStyle/>
+          <a:p>
+            <a:pPr>
+              <a:spcAft>
+                <a:spcPts val="1260"/>
+              </a:spcAft>
+            </a:pPr>
+            <a:r>
+              <a:rPr sz="2800" b="1">
+                <a:solidFill>
+                  <a:srgbClr val="2F6FB5"/>
+                </a:solidFill>
+                <a:latin typeface="Nunito Sans"/>
+              </a:rPr>
+              <a:t>Dilema real</a:t>
+            </a:r>
+          </a:p>
+        </p:txBody>
+      </p:sp>
+      <p:sp>
+        <p:nvSpPr>
+          <p:cNvPr id="9" name="TextBox 8"/>
+          <p:cNvSpPr txBox="1"/>
+          <p:nvPr/>
+        </p:nvSpPr>
+        <p:spPr>
+          <a:xfrm>
+            <a:off x="6446000" y="2400000"/>
+            <a:ext cx="4906000" cy="3500000"/>
+          </a:xfrm>
+          <a:prstGeom prst="rect">
+            <a:avLst/>
+          </a:prstGeom>
+          <a:noFill/>
+        </p:spPr>
+        <p:txBody>
+          <a:bodyPr wrap="square">
+            <a:spAutoFit/>
+          </a:bodyPr>
+          <a:lstStyle/>
+          <a:p>
+            <a:pPr>
+              <a:spcAft>
+                <a:spcPts val="1170"/>
+              </a:spcAft>
+            </a:pPr>
+            <a:r>
+              <a:rPr sz="2600" b="1">
+                <a:solidFill>
+                  <a:srgbClr val="E8793A"/>
+                </a:solidFill>
+                <a:latin typeface="Nunito Sans"/>
+              </a:rPr>
+              <a:t>• </a:t>
+            </a:r>
+            <a:r>
+              <a:rPr sz="2600" b="0">
+                <a:solidFill>
+                  <a:srgbClr val="1F2A44"/>
+                </a:solidFill>
+                <a:latin typeface="Nunito Sans"/>
+              </a:rPr>
+              <a:t>Las dos opciones son de verdad las únicas</a:t>
+            </a:r>
+          </a:p>
+          <a:p>
+            <a:pPr>
+              <a:spcAft>
+                <a:spcPts val="1170"/>
+              </a:spcAft>
+            </a:pPr>
+            <a:r>
+              <a:rPr sz="2600" b="1">
+                <a:solidFill>
+                  <a:srgbClr val="E8793A"/>
+                </a:solidFill>
+                <a:latin typeface="Nunito Sans"/>
+              </a:rPr>
+              <a:t>• </a:t>
+            </a:r>
+            <a:r>
+              <a:rPr sz="2600" b="0">
+                <a:solidFill>
+                  <a:srgbClr val="1F2A44"/>
+                </a:solidFill>
+                <a:latin typeface="Nunito Sans"/>
+              </a:rPr>
+              <a:t>Elegir una impide la otra</a:t>
+            </a:r>
+          </a:p>
+          <a:p>
+            <a:pPr>
+              <a:spcAft>
+                <a:spcPts val="1170"/>
+              </a:spcAft>
+            </a:pPr>
+            <a:r>
+              <a:rPr sz="2600" b="1">
+                <a:solidFill>
+                  <a:srgbClr val="E8793A"/>
+                </a:solidFill>
+                <a:latin typeface="Nunito Sans"/>
+              </a:rPr>
+              <a:t>• </a:t>
+            </a:r>
+            <a:r>
+              <a:rPr sz="2600" b="0">
+                <a:solidFill>
+                  <a:srgbClr val="1F2A44"/>
+                </a:solidFill>
+                <a:latin typeface="Nunito Sans"/>
+              </a:rPr>
+              <a:t>Se puede comprobar que no hay más</a:t>
             </a:r>
           </a:p>
         </p:txBody>
@@ -5095,8 +5212,8 @@
         </p:nvSpPr>
         <p:spPr>
           <a:xfrm>
-            <a:off x="640000" y="1300000"/>
-            <a:ext cx="10912000" cy="4800000"/>
+            <a:off x="640000" y="760000"/>
+            <a:ext cx="10912000" cy="800000"/>
           </a:xfrm>
           <a:prstGeom prst="rect">
             <a:avLst/>
@@ -5111,76 +5228,56 @@
           <a:p>
             <a:pPr>
               <a:spcAft>
-                <a:spcPts val="1350"/>
-              </a:spcAft>
-            </a:pPr>
-            <a:r>
-              <a:rPr sz="3000" b="1">
-                <a:solidFill>
-                  <a:srgbClr val="E8793A"/>
-                </a:solidFill>
-                <a:latin typeface="Nunito Sans"/>
-              </a:rPr>
-              <a:t>1. </a:t>
-            </a:r>
-            <a:r>
-              <a:rPr sz="3000" b="0">
+                <a:spcPts val="1710"/>
+              </a:spcAft>
+            </a:pPr>
+            <a:r>
+              <a:rPr sz="3800" b="1">
                 <a:solidFill>
                   <a:srgbClr val="1F2A44"/>
                 </a:solidFill>
-                <a:latin typeface="Nunito Sans"/>
-              </a:rPr>
-              <a:t>Un experto sabe mucho de su tema, pero no de todos.</a:t>
-            </a:r>
-          </a:p>
-          <a:p>
-            <a:pPr>
-              <a:spcAft>
-                <a:spcPts val="1350"/>
-              </a:spcAft>
-            </a:pPr>
-            <a:r>
-              <a:rPr sz="3000" b="1">
-                <a:solidFill>
-                  <a:srgbClr val="E8793A"/>
-                </a:solidFill>
-                <a:latin typeface="Nunito Sans"/>
-              </a:rPr>
-              <a:t>2. </a:t>
-            </a:r>
-            <a:r>
-              <a:rPr sz="3000" b="0">
-                <a:solidFill>
-                  <a:srgbClr val="1F2A44"/>
-                </a:solidFill>
-                <a:latin typeface="Nunito Sans"/>
-              </a:rPr>
-              <a:t>Antes de fiarte, mira su campo, el consenso, sus intereses y sus pruebas.</a:t>
-            </a:r>
-          </a:p>
-          <a:p>
-            <a:pPr>
-              <a:spcAft>
-                <a:spcPts val="1350"/>
-              </a:spcAft>
-            </a:pPr>
-            <a:r>
-              <a:rPr sz="3000" b="1">
-                <a:solidFill>
-                  <a:srgbClr val="E8793A"/>
-                </a:solidFill>
-                <a:latin typeface="Nunito Sans"/>
-              </a:rPr>
-              <a:t>3. </a:t>
-            </a:r>
-            <a:r>
-              <a:rPr sz="3000" b="0">
-                <a:solidFill>
-                  <a:srgbClr val="1F2A44"/>
-                </a:solidFill>
-                <a:latin typeface="Nunito Sans"/>
-              </a:rPr>
-              <a:t>Si pasa las cuatro preguntas, fiarse es razonable, aunque los expertos también pueden fallar.</a:t>
+                <a:latin typeface="Fredoka"/>
+              </a:rPr>
+              <a:t>Escríbelo tú primero, sin mirar</a:t>
+            </a:r>
+          </a:p>
+        </p:txBody>
+      </p:sp>
+      <p:sp>
+        <p:nvSpPr>
+          <p:cNvPr id="4" name="TextBox 3"/>
+          <p:cNvSpPr txBox="1"/>
+          <p:nvPr/>
+        </p:nvSpPr>
+        <p:spPr>
+          <a:xfrm>
+            <a:off x="640000" y="1800000"/>
+            <a:ext cx="10912000" cy="1500000"/>
+          </a:xfrm>
+          <a:prstGeom prst="rect">
+            <a:avLst/>
+          </a:prstGeom>
+          <a:noFill/>
+        </p:spPr>
+        <p:txBody>
+          <a:bodyPr wrap="square">
+            <a:spAutoFit/>
+          </a:bodyPr>
+          <a:lstStyle/>
+          <a:p>
+            <a:pPr>
+              <a:spcAft>
+                <a:spcPts val="1170"/>
+              </a:spcAft>
+            </a:pPr>
+            <a:r>
+              <a:rPr sz="2600" b="0">
+                <a:solidFill>
+                  <a:srgbClr val="4A5568"/>
+                </a:solidFill>
+                <a:latin typeface="Nunito Sans"/>
+              </a:rPr>
+              <a:t>Dos minutos. Después lo comparamos.</a:t>
             </a:r>
           </a:p>
         </p:txBody>
@@ -5199,7 +5296,7 @@
     <p:bg>
       <p:bgPr>
         <a:solidFill>
-          <a:srgbClr val="1F2A44"/>
+          <a:srgbClr val="FBF7EF"/>
         </a:solidFill>
         <a:effectLst/>
       </p:bgPr>
@@ -5241,11 +5338,11 @@
             <a:r>
               <a:rPr sz="1400" b="1">
                 <a:solidFill>
-                  <a:srgbClr val="F4B183"/>
-                </a:solidFill>
-                <a:latin typeface="Nunito Sans"/>
-              </a:rPr>
-              <a:t>VÍDEO</a:t>
+                  <a:srgbClr val="E8793A"/>
+                </a:solidFill>
+                <a:latin typeface="Nunito Sans"/>
+              </a:rPr>
+              <a:t>LO DE HOY EN TRES LÍNEAS</a:t>
             </a:r>
           </a:p>
         </p:txBody>
@@ -5258,8 +5355,8 @@
         </p:nvSpPr>
         <p:spPr>
           <a:xfrm>
-            <a:off x="640000" y="760000"/>
-            <a:ext cx="10912000" cy="800000"/>
+            <a:off x="640000" y="1300000"/>
+            <a:ext cx="10912000" cy="4800000"/>
           </a:xfrm>
           <a:prstGeom prst="rect">
             <a:avLst/>
@@ -5274,56 +5371,76 @@
           <a:p>
             <a:pPr>
               <a:spcAft>
-                <a:spcPts val="1620"/>
-              </a:spcAft>
-            </a:pPr>
-            <a:r>
-              <a:rPr sz="3600" b="1">
-                <a:solidFill>
-                  <a:srgbClr val="FBF7EF"/>
-                </a:solidFill>
-                <a:latin typeface="Fredoka"/>
-              </a:rPr>
-              <a:t>Cómo saber si podemos fiarnos de un experto</a:t>
-            </a:r>
-          </a:p>
-        </p:txBody>
-      </p:sp>
-      <p:sp>
-        <p:nvSpPr>
-          <p:cNvPr id="4" name="TextBox 3"/>
-          <p:cNvSpPr txBox="1"/>
-          <p:nvPr/>
-        </p:nvSpPr>
-        <p:spPr>
-          <a:xfrm>
-            <a:off x="640000" y="2200000"/>
-            <a:ext cx="10912000" cy="2000000"/>
-          </a:xfrm>
-          <a:prstGeom prst="rect">
-            <a:avLst/>
-          </a:prstGeom>
-          <a:noFill/>
-        </p:spPr>
-        <p:txBody>
-          <a:bodyPr wrap="square">
-            <a:spAutoFit/>
-          </a:bodyPr>
-          <a:lstStyle/>
-          <a:p>
-            <a:pPr>
-              <a:spcAft>
-                <a:spcPts val="1080"/>
-              </a:spcAft>
-            </a:pPr>
-            <a:r>
-              <a:rPr sz="2400" b="0">
-                <a:solidFill>
-                  <a:srgbClr val="C9D3E6"/>
-                </a:solidFill>
-                <a:latin typeface="Nunito Sans"/>
-              </a:rPr>
-              <a:t>Que vean que fiarse de los expertos es razonable si se mira su campo, el consenso y sus pruebas.</a:t>
+                <a:spcPts val="1350"/>
+              </a:spcAft>
+            </a:pPr>
+            <a:r>
+              <a:rPr sz="3000" b="1">
+                <a:solidFill>
+                  <a:srgbClr val="E8793A"/>
+                </a:solidFill>
+                <a:latin typeface="Nunito Sans"/>
+              </a:rPr>
+              <a:t>1. </a:t>
+            </a:r>
+            <a:r>
+              <a:rPr sz="3000" b="0">
+                <a:solidFill>
+                  <a:srgbClr val="1F2A44"/>
+                </a:solidFill>
+                <a:latin typeface="Nunito Sans"/>
+              </a:rPr>
+              <a:t>El falso dilema presenta solo dos opciones cuando en realidad hay más.</a:t>
+            </a:r>
+          </a:p>
+          <a:p>
+            <a:pPr>
+              <a:spcAft>
+                <a:spcPts val="1350"/>
+              </a:spcAft>
+            </a:pPr>
+            <a:r>
+              <a:rPr sz="3000" b="1">
+                <a:solidFill>
+                  <a:srgbClr val="E8793A"/>
+                </a:solidFill>
+                <a:latin typeface="Nunito Sans"/>
+              </a:rPr>
+              <a:t>2. </a:t>
+            </a:r>
+            <a:r>
+              <a:rPr sz="3000" b="0">
+                <a:solidFill>
+                  <a:srgbClr val="1F2A44"/>
+                </a:solidFill>
+                <a:latin typeface="Nunito Sans"/>
+              </a:rPr>
+              <a:t>Las otras salidas suelen estar en medio, en las dos a la vez o en otra distinta.</a:t>
+            </a:r>
+          </a:p>
+          <a:p>
+            <a:pPr>
+              <a:spcAft>
+                <a:spcPts val="1350"/>
+              </a:spcAft>
+            </a:pPr>
+            <a:r>
+              <a:rPr sz="3000" b="1">
+                <a:solidFill>
+                  <a:srgbClr val="E8793A"/>
+                </a:solidFill>
+                <a:latin typeface="Nunito Sans"/>
+              </a:rPr>
+              <a:t>3. </a:t>
+            </a:r>
+            <a:r>
+              <a:rPr sz="3000" b="0">
+                <a:solidFill>
+                  <a:srgbClr val="1F2A44"/>
+                </a:solidFill>
+                <a:latin typeface="Nunito Sans"/>
+              </a:rPr>
+              <a:t>Para desmontarlo: ¿seguro que no hay una tercera opción?</a:t>
             </a:r>
           </a:p>
         </p:txBody>
@@ -5388,6 +5505,149 @@
                 </a:solidFill>
                 <a:latin typeface="Nunito Sans"/>
               </a:rPr>
+              <a:t>VÍDEO</a:t>
+            </a:r>
+          </a:p>
+        </p:txBody>
+      </p:sp>
+      <p:sp>
+        <p:nvSpPr>
+          <p:cNvPr id="3" name="TextBox 2"/>
+          <p:cNvSpPr txBox="1"/>
+          <p:nvPr/>
+        </p:nvSpPr>
+        <p:spPr>
+          <a:xfrm>
+            <a:off x="640000" y="760000"/>
+            <a:ext cx="10912000" cy="800000"/>
+          </a:xfrm>
+          <a:prstGeom prst="rect">
+            <a:avLst/>
+          </a:prstGeom>
+          <a:noFill/>
+        </p:spPr>
+        <p:txBody>
+          <a:bodyPr wrap="square">
+            <a:spAutoFit/>
+          </a:bodyPr>
+          <a:lstStyle/>
+          <a:p>
+            <a:pPr>
+              <a:spcAft>
+                <a:spcPts val="1620"/>
+              </a:spcAft>
+            </a:pPr>
+            <a:r>
+              <a:rPr sz="3600" b="1">
+                <a:solidFill>
+                  <a:srgbClr val="FBF7EF"/>
+                </a:solidFill>
+                <a:latin typeface="Fredoka"/>
+              </a:rPr>
+              <a:t>La falacia del falso dilema</a:t>
+            </a:r>
+          </a:p>
+        </p:txBody>
+      </p:sp>
+      <p:sp>
+        <p:nvSpPr>
+          <p:cNvPr id="4" name="TextBox 3"/>
+          <p:cNvSpPr txBox="1"/>
+          <p:nvPr/>
+        </p:nvSpPr>
+        <p:spPr>
+          <a:xfrm>
+            <a:off x="640000" y="2200000"/>
+            <a:ext cx="10912000" cy="2000000"/>
+          </a:xfrm>
+          <a:prstGeom prst="rect">
+            <a:avLst/>
+          </a:prstGeom>
+          <a:noFill/>
+        </p:spPr>
+        <p:txBody>
+          <a:bodyPr wrap="square">
+            <a:spAutoFit/>
+          </a:bodyPr>
+          <a:lstStyle/>
+          <a:p>
+            <a:pPr>
+              <a:spcAft>
+                <a:spcPts val="1080"/>
+              </a:spcAft>
+            </a:pPr>
+            <a:r>
+              <a:rPr sz="2400" b="0">
+                <a:solidFill>
+                  <a:srgbClr val="C9D3E6"/>
+                </a:solidFill>
+                <a:latin typeface="Nunito Sans"/>
+              </a:rPr>
+              <a:t>Ver más ejemplos del «o esto o aquello» en anuncios y discusiones.</a:t>
+            </a:r>
+          </a:p>
+        </p:txBody>
+      </p:sp>
+    </p:spTree>
+  </p:cSld>
+  <p:clrMapOvr>
+    <a:masterClrMapping/>
+  </p:clrMapOvr>
+</p:sld>
+</file>
+
+<file path=ppt/slides/slide18.xml><?xml version="1.0" encoding="utf-8"?>
+<p:sld xmlns:a="http://schemas.openxmlformats.org/drawingml/2006/main" xmlns:p="http://schemas.openxmlformats.org/presentationml/2006/main" xmlns:r="http://schemas.openxmlformats.org/officeDocument/2006/relationships">
+  <p:cSld>
+    <p:bg>
+      <p:bgPr>
+        <a:solidFill>
+          <a:srgbClr val="1F2A44"/>
+        </a:solidFill>
+        <a:effectLst/>
+      </p:bgPr>
+    </p:bg>
+    <p:spTree>
+      <p:nvGrpSpPr>
+        <p:cNvPr id="1" name=""/>
+        <p:cNvGrpSpPr/>
+        <p:nvPr/>
+      </p:nvGrpSpPr>
+      <p:grpSpPr/>
+      <p:sp>
+        <p:nvSpPr>
+          <p:cNvPr id="2" name="TextBox 1"/>
+          <p:cNvSpPr txBox="1"/>
+          <p:nvPr/>
+        </p:nvSpPr>
+        <p:spPr>
+          <a:xfrm>
+            <a:off x="640000" y="380000"/>
+            <a:ext cx="10912000" cy="420000"/>
+          </a:xfrm>
+          <a:prstGeom prst="rect">
+            <a:avLst/>
+          </a:prstGeom>
+          <a:noFill/>
+        </p:spPr>
+        <p:txBody>
+          <a:bodyPr wrap="square">
+            <a:spAutoFit/>
+          </a:bodyPr>
+          <a:lstStyle/>
+          <a:p>
+            <a:pPr>
+              <a:spcAft>
+                <a:spcPts val="630"/>
+              </a:spcAft>
+            </a:pPr>
+            <a:r>
+              <a:rPr sz="1400" b="1">
+                <a:solidFill>
+                  <a:srgbClr val="F4B183"/>
+                </a:solidFill>
+                <a:latin typeface="Nunito Sans"/>
+              </a:rPr>
               <a:t>AHORA, LA HOJA DEL DÍA</a:t>
             </a:r>
           </a:p>
@@ -5981,7 +6241,7 @@
                 </a:solidFill>
                 <a:latin typeface="Nunito Sans"/>
               </a:rPr>
-              <a:t>La autoridad por saber me pide que me ______ lo que dice.  (sesión 25)</a:t>
+              <a:t>Una generalización bien hecha usa casos suficientes y ______.  (sesión 25)</a:t>
             </a:r>
           </a:p>
           <a:p>
@@ -6006,7 +6266,7 @@
                 </a:solidFill>
                 <a:latin typeface="Nunito Sans"/>
               </a:rPr>
-              <a:t>El poder en un sitio no da ______ en todos los temas: la directora no sabe más de fútbol por su cargo.  (sesión 25)</a:t>
+              <a:t>La generalización apresurada también se llama generalización ______.  (sesión 25)</a:t>
             </a:r>
           </a:p>
           <a:p>
@@ -6031,7 +6291,7 @@
                 </a:solidFill>
                 <a:latin typeface="Nunito Sans"/>
               </a:rPr>
-              <a:t>Pregunta que desmonta la pendiente resbaladiza: ¿por qué un ______ lleva seguro al siguiente?  (sesión 21)</a:t>
+              <a:t>Tres formas de fabricar el muñeco: exagerar, ______ e inventar.  (sesión 21)</a:t>
             </a:r>
           </a:p>
         </p:txBody>
@@ -6183,7 +6443,7 @@
                 </a:solidFill>
                 <a:latin typeface="Nunito Sans"/>
               </a:rPr>
-              <a:t>La autoridad por saber me pide que me </a:t>
+              <a:t>Una generalización bien hecha usa casos suficientes y </a:t>
             </a:r>
             <a:r>
               <a:rPr sz="2600" b="1">
@@ -6192,7 +6452,7 @@
                 </a:solidFill>
                 <a:latin typeface="Nunito Sans"/>
               </a:rPr>
-              <a:t>crea</a:t>
+              <a:t>variados</a:t>
             </a:r>
             <a:r>
               <a:rPr sz="2600" b="0">
@@ -6201,7 +6461,7 @@
                 </a:solidFill>
                 <a:latin typeface="Nunito Sans"/>
               </a:rPr>
-              <a:t> lo que dice.  (sesión 25)</a:t>
+              <a:t>.  (sesión 25)</a:t>
             </a:r>
           </a:p>
           <a:p>
@@ -6226,7 +6486,7 @@
                 </a:solidFill>
                 <a:latin typeface="Nunito Sans"/>
               </a:rPr>
-              <a:t>El poder en un sitio no da </a:t>
+              <a:t>La generalización apresurada también se llama generalización </a:t>
             </a:r>
             <a:r>
               <a:rPr sz="2600" b="1">
@@ -6235,7 +6495,7 @@
                 </a:solidFill>
                 <a:latin typeface="Nunito Sans"/>
               </a:rPr>
-              <a:t>saber</a:t>
+              <a:t>precipitada</a:t>
             </a:r>
             <a:r>
               <a:rPr sz="2600" b="0">
@@ -6244,7 +6504,7 @@
                 </a:solidFill>
                 <a:latin typeface="Nunito Sans"/>
               </a:rPr>
-              <a:t> en todos los temas: la directora no sabe más de fútbol por su cargo.  (sesión 25)</a:t>
+              <a:t>.  (sesión 25)</a:t>
             </a:r>
           </a:p>
           <a:p>
@@ -6269,7 +6529,7 @@
                 </a:solidFill>
                 <a:latin typeface="Nunito Sans"/>
               </a:rPr>
-              <a:t>Pregunta que desmonta la pendiente resbaladiza: ¿por qué un </a:t>
+              <a:t>Tres formas de fabricar el muñeco: exagerar, </a:t>
             </a:r>
             <a:r>
               <a:rPr sz="2600" b="1">
@@ -6278,7 +6538,7 @@
                 </a:solidFill>
                 <a:latin typeface="Nunito Sans"/>
               </a:rPr>
-              <a:t>paso</a:t>
+              <a:t>recortar</a:t>
             </a:r>
             <a:r>
               <a:rPr sz="2600" b="0">
@@ -6287,7 +6547,7 @@
                 </a:solidFill>
                 <a:latin typeface="Nunito Sans"/>
               </a:rPr>
-              <a:t> lleva seguro al siguiente?  (sesión 21)</a:t>
+              <a:t> e inventar.  (sesión 21)</a:t>
             </a:r>
           </a:p>
         </p:txBody>
@@ -6434,7 +6694,7 @@
                 </a:solidFill>
                 <a:latin typeface="Nunito Sans"/>
               </a:rPr>
-              <a:t>Una dentista con muchos seguidores dice en Instagram que un dentífrico es «el mejor del mundo». Debajo pone: «colaboración pagada».</a:t>
+              <a:t>Mensaje que recibe una chica de su cuadrilla: «O vienes a Aste Nagusia toda la noche, o es que ya no eres de las nuestras».</a:t>
             </a:r>
           </a:p>
         </p:txBody>
@@ -6473,7 +6733,7 @@
                 </a:solidFill>
                 <a:latin typeface="Nunito Sans"/>
               </a:rPr>
-              <a:t>¿Te fías igual que si te lo dijera tu dentista en la consulta?</a:t>
+              <a:t>¿De verdad solo hay esas dos opciones?</a:t>
             </a:r>
           </a:p>
         </p:txBody>
@@ -6577,7 +6837,7 @@
                 </a:solidFill>
                 <a:latin typeface="Fredoka"/>
               </a:rPr>
-              <a:t>Cuatro preguntas para un experto</a:t>
+              <a:t>«O esto o aquello»</a:t>
             </a:r>
           </a:p>
         </p:txBody>
@@ -6642,7 +6902,7 @@
                 </a:solidFill>
                 <a:latin typeface="Nunito Sans"/>
               </a:rPr>
-              <a:t>BLOQUE 1 · CUATRO PREGUNTAS PARA UN EXPERTO</a:t>
+              <a:t>BLOQUE 1 · «O ESTO O AQUELLO»</a:t>
             </a:r>
           </a:p>
         </p:txBody>
@@ -6681,7 +6941,7 @@
                 </a:solidFill>
                 <a:latin typeface="Fredoka"/>
               </a:rPr>
-              <a:t>Experto</a:t>
+              <a:t>Falso dilema</a:t>
             </a:r>
           </a:p>
         </p:txBody>
@@ -6763,7 +7023,7 @@
                 </a:solidFill>
                 <a:latin typeface="Nunito Sans"/>
               </a:rPr>
-              <a:t>Un experto es una persona que sabe mucho de un tema porque lo ha estudiado o trabajado durante años.</a:t>
+              <a:t>Presentar solo dos opciones, como si no hubiera más, cuando en realidad hay otras salidas.</a:t>
             </a:r>
           </a:p>
         </p:txBody>
@@ -6805,22 +7065,63 @@
               <a:t>• </a:t>
             </a:r>
             <a:r>
+              <a:rPr sz="2800" b="1">
+                <a:solidFill>
+                  <a:srgbClr val="1F2A44"/>
+                </a:solidFill>
+                <a:latin typeface="Nunito Sans"/>
+              </a:rPr>
+              <a:t>Dilema</a:t>
+            </a:r>
+            <a:r>
               <a:rPr sz="2800" b="0">
                 <a:solidFill>
                   <a:srgbClr val="1F2A44"/>
                 </a:solidFill>
                 <a:latin typeface="Nunito Sans"/>
               </a:rPr>
-              <a:t>Sabe de </a:t>
-            </a:r>
+              <a:t>: tener que elegir entre dos opciones</a:t>
+            </a:r>
+          </a:p>
+          <a:p>
+            <a:pPr>
+              <a:spcAft>
+                <a:spcPts val="1260"/>
+              </a:spcAft>
+            </a:pPr>
             <a:r>
               <a:rPr sz="2800" b="1">
                 <a:solidFill>
+                  <a:srgbClr val="E8793A"/>
+                </a:solidFill>
+                <a:latin typeface="Nunito Sans"/>
+              </a:rPr>
+              <a:t>• </a:t>
+            </a:r>
+            <a:r>
+              <a:rPr sz="2800" b="0">
+                <a:solidFill>
                   <a:srgbClr val="1F2A44"/>
                 </a:solidFill>
                 <a:latin typeface="Nunito Sans"/>
               </a:rPr>
-              <a:t>su</a:t>
+              <a:t>Suele sonar así: «o… o…»</a:t>
+            </a:r>
+          </a:p>
+          <a:p>
+            <a:pPr>
+              <a:spcAft>
+                <a:spcPts val="1260"/>
+              </a:spcAft>
+            </a:pPr>
+            <a:r>
+              <a:rPr sz="2800" b="1">
+                <a:solidFill>
+                  <a:srgbClr val="E8793A"/>
+                </a:solidFill>
+                <a:latin typeface="Nunito Sans"/>
+              </a:rPr>
+              <a:t>• </a:t>
             </a:r>
             <a:r>
               <a:rPr sz="2800" b="0">
@@ -6829,7 +7130,7 @@
                 </a:solidFill>
                 <a:latin typeface="Nunito Sans"/>
               </a:rPr>
-              <a:t> tema, no de todos</a:t>
+              <a:t>Suele empujarte hacia la opción que quiere el otro</a:t>
             </a:r>
           </a:p>
           <a:p>
@@ -6854,32 +7155,16 @@
                 </a:solidFill>
                 <a:latin typeface="Nunito Sans"/>
               </a:rPr>
-              <a:t>Puede equivocarse, como todos</a:t>
-            </a:r>
-          </a:p>
-          <a:p>
-            <a:pPr>
-              <a:spcAft>
-                <a:spcPts val="1260"/>
-              </a:spcAft>
-            </a:pPr>
+              <a:t>Pregunta: </a:t>
+            </a:r>
             <a:r>
               <a:rPr sz="2800" b="1">
                 <a:solidFill>
-                  <a:srgbClr val="E8793A"/>
-                </a:solidFill>
-                <a:latin typeface="Nunito Sans"/>
-              </a:rPr>
-              <a:t>• </a:t>
-            </a:r>
-            <a:r>
-              <a:rPr sz="2800" b="0">
-                <a:solidFill>
                   <a:srgbClr val="1F2A44"/>
                 </a:solidFill>
                 <a:latin typeface="Nunito Sans"/>
               </a:rPr>
-              <a:t>Nos ahorra tener que comprobarlo todo nosotros</a:t>
+              <a:t>¿seguro que no hay una tercera opción?</a:t>
             </a:r>
           </a:p>
         </p:txBody>
@@ -6944,7 +7229,7 @@
                 </a:solidFill>
                 <a:latin typeface="Nunito Sans"/>
               </a:rPr>
-              <a:t>BLOQUE 1 · CUATRO PREGUNTAS PARA UN EXPERTO</a:t>
+              <a:t>BLOQUE 1 · «O ESTO O AQUELLO»</a:t>
             </a:r>
           </a:p>
         </p:txBody>
@@ -6983,267 +7268,170 @@
                 </a:solidFill>
                 <a:latin typeface="Fredoka"/>
               </a:rPr>
-              <a:t>Las cuatro preguntas</a:t>
-            </a:r>
-          </a:p>
-        </p:txBody>
-      </p:sp>
-      <p:graphicFrame>
-        <p:nvGraphicFramePr>
-          <p:cNvPr id="4" name="Table 3"/>
-          <p:cNvGraphicFramePr>
-            <a:graphicFrameLocks noGrp="1"/>
-          </p:cNvGraphicFramePr>
+              <a:t>Dónde se esconden las otras opciones</a:t>
+            </a:r>
+          </a:p>
+        </p:txBody>
+      </p:sp>
+      <p:sp>
+        <p:nvSpPr>
+          <p:cNvPr id="4" name="TextBox 3"/>
+          <p:cNvSpPr txBox="1"/>
           <p:nvPr/>
-        </p:nvGraphicFramePr>
-        <p:xfrm>
-          <a:off x="640000" y="1700000"/>
-          <a:ext cx="10912000" cy="3000000"/>
-        </p:xfrm>
-        <a:graphic>
-          <a:graphicData uri="http://schemas.openxmlformats.org/drawingml/2006/table">
-            <a:tbl>
-              <a:tblPr firstRow="1" bandRow="1">
-                <a:tableStyleId>{5C22544A-7EE6-4342-B048-85BDC9FD1C3A}</a:tableStyleId>
-              </a:tblPr>
-              <a:tblGrid>
-                <a:gridCol w="5456000"/>
-                <a:gridCol w="5456000"/>
-              </a:tblGrid>
-              <a:tr h="600000">
-                <a:tc>
-                  <a:txBody>
-                    <a:bodyPr/>
-                    <a:lstStyle/>
-                    <a:p>
-                      <a:r>
-                        <a:rPr sz="2000" b="1">
-                          <a:solidFill>
-                            <a:srgbClr val="FBF7EF"/>
-                          </a:solidFill>
-                          <a:latin typeface="Fredoka"/>
-                        </a:rPr>
-                        <a:t>Mira…</a:t>
-                      </a:r>
-                    </a:p>
-                  </a:txBody>
-                  <a:tcPr>
-                    <a:solidFill>
-                      <a:srgbClr val="1F2A44"/>
-                    </a:solidFill>
-                  </a:tcPr>
-                </a:tc>
-                <a:tc>
-                  <a:txBody>
-                    <a:bodyPr/>
-                    <a:lstStyle/>
-                    <a:p>
-                      <a:r>
-                        <a:rPr sz="2000" b="1">
-                          <a:solidFill>
-                            <a:srgbClr val="FBF7EF"/>
-                          </a:solidFill>
-                          <a:latin typeface="Fredoka"/>
-                        </a:rPr>
-                        <a:t>Pregunta</a:t>
-                      </a:r>
-                    </a:p>
-                  </a:txBody>
-                  <a:tcPr>
-                    <a:solidFill>
-                      <a:srgbClr val="1F2A44"/>
-                    </a:solidFill>
-                  </a:tcPr>
-                </a:tc>
-              </a:tr>
-              <a:tr h="600000">
-                <a:tc>
-                  <a:txBody>
-                    <a:bodyPr/>
-                    <a:lstStyle/>
-                    <a:p>
-                      <a:r>
-                        <a:rPr sz="2000" b="1">
-                          <a:solidFill>
-                            <a:srgbClr val="1F2A44"/>
-                          </a:solidFill>
-                          <a:latin typeface="Nunito Sans"/>
-                        </a:rPr>
-                        <a:t>Su campo</a:t>
-                      </a:r>
-                    </a:p>
-                  </a:txBody>
-                  <a:tcPr>
-                    <a:solidFill>
-                      <a:srgbClr val="FFFFFF"/>
-                    </a:solidFill>
-                  </a:tcPr>
-                </a:tc>
-                <a:tc>
-                  <a:txBody>
-                    <a:bodyPr/>
-                    <a:lstStyle/>
-                    <a:p>
-                      <a:r>
-                        <a:rPr sz="2000" b="0">
-                          <a:solidFill>
-                            <a:srgbClr val="1F2A44"/>
-                          </a:solidFill>
-                          <a:latin typeface="Nunito Sans"/>
-                        </a:rPr>
-                        <a:t>¿Habla de lo que ha estudiado?</a:t>
-                      </a:r>
-                    </a:p>
-                  </a:txBody>
-                  <a:tcPr>
-                    <a:solidFill>
-                      <a:srgbClr val="FFFFFF"/>
-                    </a:solidFill>
-                  </a:tcPr>
-                </a:tc>
-              </a:tr>
-              <a:tr h="600000">
-                <a:tc>
-                  <a:txBody>
-                    <a:bodyPr/>
-                    <a:lstStyle/>
-                    <a:p>
-                      <a:r>
-                        <a:rPr sz="2000" b="1">
-                          <a:solidFill>
-                            <a:srgbClr val="1F2A44"/>
-                          </a:solidFill>
-                          <a:latin typeface="Nunito Sans"/>
-                        </a:rPr>
-                        <a:t>El consenso</a:t>
-                      </a:r>
-                    </a:p>
-                  </a:txBody>
-                  <a:tcPr>
-                    <a:solidFill>
-                      <a:srgbClr val="EAF0F7"/>
-                    </a:solidFill>
-                  </a:tcPr>
-                </a:tc>
-                <a:tc>
-                  <a:txBody>
-                    <a:bodyPr/>
-                    <a:lstStyle/>
-                    <a:p>
-                      <a:r>
-                        <a:rPr sz="2000" b="0">
-                          <a:solidFill>
-                            <a:srgbClr val="1F2A44"/>
-                          </a:solidFill>
-                          <a:latin typeface="Nunito Sans"/>
-                        </a:rPr>
-                        <a:t>¿Qué dicen la mayoría de los expertos del tema?</a:t>
-                      </a:r>
-                    </a:p>
-                  </a:txBody>
-                  <a:tcPr>
-                    <a:solidFill>
-                      <a:srgbClr val="EAF0F7"/>
-                    </a:solidFill>
-                  </a:tcPr>
-                </a:tc>
-              </a:tr>
-              <a:tr h="600000">
-                <a:tc>
-                  <a:txBody>
-                    <a:bodyPr/>
-                    <a:lstStyle/>
-                    <a:p>
-                      <a:r>
-                        <a:rPr sz="2000" b="1">
-                          <a:solidFill>
-                            <a:srgbClr val="1F2A44"/>
-                          </a:solidFill>
-                          <a:latin typeface="Nunito Sans"/>
-                        </a:rPr>
-                        <a:t>Sus intereses</a:t>
-                      </a:r>
-                    </a:p>
-                  </a:txBody>
-                  <a:tcPr>
-                    <a:solidFill>
-                      <a:srgbClr val="FFFFFF"/>
-                    </a:solidFill>
-                  </a:tcPr>
-                </a:tc>
-                <a:tc>
-                  <a:txBody>
-                    <a:bodyPr/>
-                    <a:lstStyle/>
-                    <a:p>
-                      <a:r>
-                        <a:rPr sz="2000" b="0">
-                          <a:solidFill>
-                            <a:srgbClr val="1F2A44"/>
-                          </a:solidFill>
-                          <a:latin typeface="Nunito Sans"/>
-                        </a:rPr>
-                        <a:t>¿Gana algo si le creo?</a:t>
-                      </a:r>
-                    </a:p>
-                  </a:txBody>
-                  <a:tcPr>
-                    <a:solidFill>
-                      <a:srgbClr val="FFFFFF"/>
-                    </a:solidFill>
-                  </a:tcPr>
-                </a:tc>
-              </a:tr>
-              <a:tr h="600000">
-                <a:tc>
-                  <a:txBody>
-                    <a:bodyPr/>
-                    <a:lstStyle/>
-                    <a:p>
-                      <a:r>
-                        <a:rPr sz="2000" b="1">
-                          <a:solidFill>
-                            <a:srgbClr val="1F2A44"/>
-                          </a:solidFill>
-                          <a:latin typeface="Nunito Sans"/>
-                        </a:rPr>
-                        <a:t>Sus pruebas</a:t>
-                      </a:r>
-                    </a:p>
-                  </a:txBody>
-                  <a:tcPr>
-                    <a:solidFill>
-                      <a:srgbClr val="EAF0F7"/>
-                    </a:solidFill>
-                  </a:tcPr>
-                </a:tc>
-                <a:tc>
-                  <a:txBody>
-                    <a:bodyPr/>
-                    <a:lstStyle/>
-                    <a:p>
-                      <a:r>
-                        <a:rPr sz="2000" b="0">
-                          <a:solidFill>
-                            <a:srgbClr val="1F2A44"/>
-                          </a:solidFill>
-                          <a:latin typeface="Nunito Sans"/>
-                        </a:rPr>
-                        <a:t>¿Explica cómo lo sabe?</a:t>
-                      </a:r>
-                    </a:p>
-                  </a:txBody>
-                  <a:tcPr>
-                    <a:solidFill>
-                      <a:srgbClr val="EAF0F7"/>
-                    </a:solidFill>
-                  </a:tcPr>
-                </a:tc>
-              </a:tr>
-            </a:tbl>
-          </a:graphicData>
-        </a:graphic>
-      </p:graphicFrame>
+        </p:nvSpPr>
+        <p:spPr>
+          <a:xfrm>
+            <a:off x="640000" y="1650000"/>
+            <a:ext cx="10912000" cy="4808000"/>
+          </a:xfrm>
+          <a:prstGeom prst="rect">
+            <a:avLst/>
+          </a:prstGeom>
+          <a:noFill/>
+        </p:spPr>
+        <p:txBody>
+          <a:bodyPr wrap="square">
+            <a:spAutoFit/>
+          </a:bodyPr>
+          <a:lstStyle/>
+          <a:p>
+            <a:pPr>
+              <a:spcAft>
+                <a:spcPts val="1260"/>
+              </a:spcAft>
+            </a:pPr>
+            <a:r>
+              <a:rPr sz="2800" b="1">
+                <a:solidFill>
+                  <a:srgbClr val="E8793A"/>
+                </a:solidFill>
+                <a:latin typeface="Nunito Sans"/>
+              </a:rPr>
+              <a:t>• </a:t>
+            </a:r>
+            <a:r>
+              <a:rPr sz="2800" b="1">
+                <a:solidFill>
+                  <a:srgbClr val="1F2A44"/>
+                </a:solidFill>
+                <a:latin typeface="Nunito Sans"/>
+              </a:rPr>
+              <a:t>En medio:</a:t>
+            </a:r>
+            <a:r>
+              <a:rPr sz="2800" b="0">
+                <a:solidFill>
+                  <a:srgbClr val="1F2A44"/>
+                </a:solidFill>
+                <a:latin typeface="Nunito Sans"/>
+              </a:rPr>
+              <a:t> ni todo ni nada, un poco</a:t>
+            </a:r>
+          </a:p>
+          <a:p>
+            <a:pPr>
+              <a:spcAft>
+                <a:spcPts val="1260"/>
+              </a:spcAft>
+            </a:pPr>
+            <a:r>
+              <a:rPr sz="2800" b="1">
+                <a:solidFill>
+                  <a:srgbClr val="E8793A"/>
+                </a:solidFill>
+                <a:latin typeface="Nunito Sans"/>
+              </a:rPr>
+              <a:t>• </a:t>
+            </a:r>
+            <a:r>
+              <a:rPr sz="2800" b="1">
+                <a:solidFill>
+                  <a:srgbClr val="1F2A44"/>
+                </a:solidFill>
+                <a:latin typeface="Nunito Sans"/>
+              </a:rPr>
+              <a:t>Las dos a la vez:</a:t>
+            </a:r>
+            <a:r>
+              <a:rPr sz="2800" b="0">
+                <a:solidFill>
+                  <a:srgbClr val="1F2A44"/>
+                </a:solidFill>
+                <a:latin typeface="Nunito Sans"/>
+              </a:rPr>
+              <a:t> estudiar y también jugar</a:t>
+            </a:r>
+          </a:p>
+          <a:p>
+            <a:pPr>
+              <a:spcAft>
+                <a:spcPts val="1260"/>
+              </a:spcAft>
+            </a:pPr>
+            <a:r>
+              <a:rPr sz="2800" b="1">
+                <a:solidFill>
+                  <a:srgbClr val="E8793A"/>
+                </a:solidFill>
+                <a:latin typeface="Nunito Sans"/>
+              </a:rPr>
+              <a:t>• </a:t>
+            </a:r>
+            <a:r>
+              <a:rPr sz="2800" b="1">
+                <a:solidFill>
+                  <a:srgbClr val="1F2A44"/>
+                </a:solidFill>
+                <a:latin typeface="Nunito Sans"/>
+              </a:rPr>
+              <a:t>Ninguna de las dos:</a:t>
+            </a:r>
+            <a:r>
+              <a:rPr sz="2800" b="0">
+                <a:solidFill>
+                  <a:srgbClr val="1F2A44"/>
+                </a:solidFill>
+                <a:latin typeface="Nunito Sans"/>
+              </a:rPr>
+              <a:t> otra cosa distinta</a:t>
+            </a:r>
+          </a:p>
+          <a:p>
+            <a:pPr>
+              <a:spcAft>
+                <a:spcPts val="1260"/>
+              </a:spcAft>
+            </a:pPr>
+            <a:r>
+              <a:rPr sz="2800" b="1">
+                <a:solidFill>
+                  <a:srgbClr val="E8793A"/>
+                </a:solidFill>
+                <a:latin typeface="Nunito Sans"/>
+              </a:rPr>
+              <a:t>• </a:t>
+            </a:r>
+            <a:r>
+              <a:rPr sz="2800" b="1">
+                <a:solidFill>
+                  <a:srgbClr val="1F2A44"/>
+                </a:solidFill>
+                <a:latin typeface="Nunito Sans"/>
+              </a:rPr>
+              <a:t>Más tarde:</a:t>
+            </a:r>
+            <a:r>
+              <a:rPr sz="2800" b="0">
+                <a:solidFill>
+                  <a:srgbClr val="1F2A44"/>
+                </a:solidFill>
+                <a:latin typeface="Nunito Sans"/>
+              </a:rPr>
+              <a:t> hoy no, otro día sí</a:t>
+            </a:r>
+          </a:p>
+        </p:txBody>
+      </p:sp>
     </p:spTree>
   </p:cSld>
   <p:clrMapOvr>
@@ -7253,6 +7441,110 @@
 </file>
 
 <file path=ppt/slides/slide8.xml><?xml version="1.0" encoding="utf-8"?>
+<p:sld xmlns:a="http://schemas.openxmlformats.org/drawingml/2006/main" xmlns:p="http://schemas.openxmlformats.org/presentationml/2006/main" xmlns:r="http://schemas.openxmlformats.org/officeDocument/2006/relationships">
+  <p:cSld>
+    <p:bg>
+      <p:bgPr>
+        <a:solidFill>
+          <a:srgbClr val="1F2A44"/>
+        </a:solidFill>
+        <a:effectLst/>
+      </p:bgPr>
+    </p:bg>
+    <p:spTree>
+      <p:nvGrpSpPr>
+        <p:cNvPr id="1" name=""/>
+        <p:cNvGrpSpPr/>
+        <p:nvPr/>
+      </p:nvGrpSpPr>
+      <p:grpSpPr/>
+      <p:sp>
+        <p:nvSpPr>
+          <p:cNvPr id="2" name="TextBox 1"/>
+          <p:cNvSpPr txBox="1"/>
+          <p:nvPr/>
+        </p:nvSpPr>
+        <p:spPr>
+          <a:xfrm>
+            <a:off x="640000" y="2300000"/>
+            <a:ext cx="10912000" cy="500000"/>
+          </a:xfrm>
+          <a:prstGeom prst="rect">
+            <a:avLst/>
+          </a:prstGeom>
+          <a:noFill/>
+        </p:spPr>
+        <p:txBody>
+          <a:bodyPr wrap="square">
+            <a:spAutoFit/>
+          </a:bodyPr>
+          <a:lstStyle/>
+          <a:p>
+            <a:pPr>
+              <a:spcAft>
+                <a:spcPts val="810"/>
+              </a:spcAft>
+            </a:pPr>
+            <a:r>
+              <a:rPr sz="1800" b="1">
+                <a:solidFill>
+                  <a:srgbClr val="F4B183"/>
+                </a:solidFill>
+                <a:latin typeface="Nunito Sans"/>
+              </a:rPr>
+              <a:t>BLOQUE 2</a:t>
+            </a:r>
+          </a:p>
+        </p:txBody>
+      </p:sp>
+      <p:sp>
+        <p:nvSpPr>
+          <p:cNvPr id="3" name="TextBox 2"/>
+          <p:cNvSpPr txBox="1"/>
+          <p:nvPr/>
+        </p:nvSpPr>
+        <p:spPr>
+          <a:xfrm>
+            <a:off x="640000" y="2800000"/>
+            <a:ext cx="10912000" cy="800000"/>
+          </a:xfrm>
+          <a:prstGeom prst="rect">
+            <a:avLst/>
+          </a:prstGeom>
+          <a:noFill/>
+        </p:spPr>
+        <p:txBody>
+          <a:bodyPr wrap="square">
+            <a:spAutoFit/>
+          </a:bodyPr>
+          <a:lstStyle/>
+          <a:p>
+            <a:pPr>
+              <a:spcAft>
+                <a:spcPts val="2160"/>
+              </a:spcAft>
+            </a:pPr>
+            <a:r>
+              <a:rPr sz="4800" b="1">
+                <a:solidFill>
+                  <a:srgbClr val="FBF7EF"/>
+                </a:solidFill>
+                <a:latin typeface="Fredoka"/>
+              </a:rPr>
+              <a:t>Casos resueltos</a:t>
+            </a:r>
+          </a:p>
+        </p:txBody>
+      </p:sp>
+    </p:spTree>
+  </p:cSld>
+  <p:clrMapOvr>
+    <a:masterClrMapping/>
+  </p:clrMapOvr>
+</p:sld>
+</file>
+
+<file path=ppt/slides/slide9.xml><?xml version="1.0" encoding="utf-8"?>
 <p:sld xmlns:a="http://schemas.openxmlformats.org/drawingml/2006/main" xmlns:p="http://schemas.openxmlformats.org/presentationml/2006/main" xmlns:r="http://schemas.openxmlformats.org/officeDocument/2006/relationships">
   <p:cSld>
     <p:bg>
@@ -7304,7 +7596,7 @@
                 </a:solidFill>
                 <a:latin typeface="Nunito Sans"/>
               </a:rPr>
-              <a:t>BLOQUE 1 · CUATRO PREGUNTAS PARA UN EXPERTO</a:t>
+              <a:t>BLOQUE 2 · CASOS RESUELTOS</a:t>
             </a:r>
           </a:p>
         </p:txBody>
@@ -7343,7 +7635,7 @@
                 </a:solidFill>
                 <a:latin typeface="Fredoka"/>
               </a:rPr>
-              <a:t>Consenso</a:t>
+              <a:t>Caso 1 · Aste Nagusia</a:t>
             </a:r>
           </a:p>
         </p:txBody>
@@ -7356,14 +7648,14 @@
         </p:nvSpPr>
         <p:spPr>
           <a:xfrm>
-            <a:off x="640000" y="1650000"/>
-            <a:ext cx="10912000" cy="1150000"/>
+            <a:off x="640000" y="1600000"/>
+            <a:ext cx="10912000" cy="1100000"/>
           </a:xfrm>
           <a:prstGeom prst="rect">
             <a:avLst/>
           </a:prstGeom>
           <a:solidFill>
-            <a:srgbClr val="EAF0F7"/>
+            <a:srgbClr val="FFFFFF"/>
           </a:solidFill>
           <a:ln>
             <a:noFill/>
@@ -7399,7 +7691,7 @@
         </p:nvSpPr>
         <p:spPr>
           <a:xfrm>
-            <a:off x="840000" y="1730000"/>
+            <a:off x="840000" y="1650000"/>
             <a:ext cx="10512000" cy="1000000"/>
           </a:xfrm>
           <a:prstGeom prst="rect">
@@ -7415,17 +7707,17 @@
           <a:p>
             <a:pPr>
               <a:spcAft>
-                <a:spcPts val="1260"/>
-              </a:spcAft>
-            </a:pPr>
-            <a:r>
-              <a:rPr sz="2800" b="1">
+                <a:spcPts val="1170"/>
+              </a:spcAft>
+            </a:pPr>
+            <a:r>
+              <a:rPr sz="2600" b="1">
                 <a:solidFill>
                   <a:srgbClr val="1F2A44"/>
                 </a:solidFill>
                 <a:latin typeface="Nunito Sans"/>
               </a:rPr>
-              <a:t>El consenso es cuando casi todos los expertos de un tema están de acuerdo después de mirar las pruebas.</a:t>
+              <a:t>Mensaje que recibe una chica de su cuadrilla: «O vienes a Aste Nagusia toda la noche, o es que ya no eres de las nuestras».</a:t>
             </a:r>
           </a:p>
         </p:txBody>
@@ -7438,8 +7730,8 @@
         </p:nvSpPr>
         <p:spPr>
           <a:xfrm>
-            <a:off x="640000" y="3000000"/>
-            <a:ext cx="10912000" cy="3458000"/>
+            <a:off x="640000" y="2900000"/>
+            <a:ext cx="10912000" cy="3500000"/>
           </a:xfrm>
           <a:prstGeom prst="rect">
             <a:avLst/>
@@ -7454,180 +7746,101 @@
           <a:p>
             <a:pPr>
               <a:spcAft>
-                <a:spcPts val="1260"/>
-              </a:spcAft>
-            </a:pPr>
-            <a:r>
-              <a:rPr sz="2800" b="1">
+                <a:spcPts val="1080"/>
+              </a:spcAft>
+            </a:pPr>
+            <a:r>
+              <a:rPr sz="2400" b="1">
                 <a:solidFill>
                   <a:srgbClr val="E8793A"/>
                 </a:solidFill>
                 <a:latin typeface="Nunito Sans"/>
               </a:rPr>
-              <a:t>• </a:t>
-            </a:r>
-            <a:r>
-              <a:rPr sz="2800" b="0">
+              <a:t>1. </a:t>
+            </a:r>
+            <a:r>
+              <a:rPr sz="2400" b="0">
                 <a:solidFill>
                   <a:srgbClr val="1F2A44"/>
                 </a:solidFill>
                 <a:latin typeface="Nunito Sans"/>
               </a:rPr>
-              <a:t>Vale más que la opinión de un experto solo</a:t>
-            </a:r>
-          </a:p>
-          <a:p>
-            <a:pPr>
-              <a:spcAft>
-                <a:spcPts val="1260"/>
-              </a:spcAft>
-            </a:pPr>
-            <a:r>
-              <a:rPr sz="2800" b="1">
+              <a:t>¿Qué dos opciones le dan a esa chica? Ir toda la noche, o dejar de ser de la cuadrilla.</a:t>
+            </a:r>
+          </a:p>
+          <a:p>
+            <a:pPr>
+              <a:spcAft>
+                <a:spcPts val="1080"/>
+              </a:spcAft>
+            </a:pPr>
+            <a:r>
+              <a:rPr sz="2400" b="1">
                 <a:solidFill>
                   <a:srgbClr val="E8793A"/>
                 </a:solidFill>
                 <a:latin typeface="Nunito Sans"/>
               </a:rPr>
-              <a:t>• </a:t>
-            </a:r>
-            <a:r>
-              <a:rPr sz="2800" b="0">
+              <a:t>2. </a:t>
+            </a:r>
+            <a:r>
+              <a:rPr sz="2400" b="0">
                 <a:solidFill>
                   <a:srgbClr val="1F2A44"/>
                 </a:solidFill>
                 <a:latin typeface="Nunito Sans"/>
               </a:rPr>
-              <a:t>Uno puede equivocarse; casi todos a la vez, es más raro</a:t>
-            </a:r>
-          </a:p>
-          <a:p>
-            <a:pPr>
-              <a:spcAft>
-                <a:spcPts val="1260"/>
-              </a:spcAft>
-            </a:pPr>
-            <a:r>
-              <a:rPr sz="2800" b="1">
+              <a:t>¿Hay más? Sí: ir un rato, ir otro día, seguir siendo amigos sin ir.</a:t>
+            </a:r>
+          </a:p>
+          <a:p>
+            <a:pPr>
+              <a:spcAft>
+                <a:spcPts val="1080"/>
+              </a:spcAft>
+            </a:pPr>
+            <a:r>
+              <a:rPr sz="2400" b="1">
                 <a:solidFill>
                   <a:srgbClr val="E8793A"/>
                 </a:solidFill>
                 <a:latin typeface="Nunito Sans"/>
               </a:rPr>
-              <a:t>• </a:t>
-            </a:r>
-            <a:r>
-              <a:rPr sz="2800" b="0">
+              <a:t>3. </a:t>
+            </a:r>
+            <a:r>
+              <a:rPr sz="2400" b="0">
                 <a:solidFill>
                   <a:srgbClr val="1F2A44"/>
                 </a:solidFill>
                 <a:latin typeface="Nunito Sans"/>
               </a:rPr>
-              <a:t>Ejemplo: la Tierra gira alrededor del Sol</a:t>
-            </a:r>
-          </a:p>
-        </p:txBody>
-      </p:sp>
-    </p:spTree>
-  </p:cSld>
-  <p:clrMapOvr>
-    <a:masterClrMapping/>
-  </p:clrMapOvr>
-</p:sld>
-</file>
-
-<file path=ppt/slides/slide9.xml><?xml version="1.0" encoding="utf-8"?>
-<p:sld xmlns:a="http://schemas.openxmlformats.org/drawingml/2006/main" xmlns:p="http://schemas.openxmlformats.org/presentationml/2006/main" xmlns:r="http://schemas.openxmlformats.org/officeDocument/2006/relationships">
-  <p:cSld>
-    <p:bg>
-      <p:bgPr>
-        <a:solidFill>
-          <a:srgbClr val="1F2A44"/>
-        </a:solidFill>
-        <a:effectLst/>
-      </p:bgPr>
-    </p:bg>
-    <p:spTree>
-      <p:nvGrpSpPr>
-        <p:cNvPr id="1" name=""/>
-        <p:cNvGrpSpPr/>
-        <p:nvPr/>
-      </p:nvGrpSpPr>
-      <p:grpSpPr/>
-      <p:sp>
-        <p:nvSpPr>
-          <p:cNvPr id="2" name="TextBox 1"/>
-          <p:cNvSpPr txBox="1"/>
-          <p:nvPr/>
-        </p:nvSpPr>
-        <p:spPr>
-          <a:xfrm>
-            <a:off x="640000" y="2300000"/>
-            <a:ext cx="10912000" cy="500000"/>
-          </a:xfrm>
-          <a:prstGeom prst="rect">
-            <a:avLst/>
-          </a:prstGeom>
-          <a:noFill/>
-        </p:spPr>
-        <p:txBody>
-          <a:bodyPr wrap="square">
-            <a:spAutoFit/>
-          </a:bodyPr>
-          <a:lstStyle/>
-          <a:p>
-            <a:pPr>
-              <a:spcAft>
-                <a:spcPts val="810"/>
-              </a:spcAft>
-            </a:pPr>
-            <a:r>
-              <a:rPr sz="1800" b="1">
-                <a:solidFill>
-                  <a:srgbClr val="F4B183"/>
-                </a:solidFill>
-                <a:latin typeface="Nunito Sans"/>
-              </a:rPr>
-              <a:t>BLOQUE 2</a:t>
-            </a:r>
-          </a:p>
-        </p:txBody>
-      </p:sp>
-      <p:sp>
-        <p:nvSpPr>
-          <p:cNvPr id="3" name="TextBox 2"/>
-          <p:cNvSpPr txBox="1"/>
-          <p:nvPr/>
-        </p:nvSpPr>
-        <p:spPr>
-          <a:xfrm>
-            <a:off x="640000" y="2800000"/>
-            <a:ext cx="10912000" cy="800000"/>
-          </a:xfrm>
-          <a:prstGeom prst="rect">
-            <a:avLst/>
-          </a:prstGeom>
-          <a:noFill/>
-        </p:spPr>
-        <p:txBody>
-          <a:bodyPr wrap="square">
-            <a:spAutoFit/>
-          </a:bodyPr>
-          <a:lstStyle/>
-          <a:p>
-            <a:pPr>
-              <a:spcAft>
-                <a:spcPts val="2160"/>
-              </a:spcAft>
-            </a:pPr>
-            <a:r>
-              <a:rPr sz="4800" b="1">
-                <a:solidFill>
-                  <a:srgbClr val="FBF7EF"/>
-                </a:solidFill>
-                <a:latin typeface="Fredoka"/>
-              </a:rPr>
-              <a:t>Casos resueltos</a:t>
+              <a:t>¿Para qué sirve el dilema? Para empujarla: la otra opción da miedo.</a:t>
+            </a:r>
+          </a:p>
+          <a:p>
+            <a:pPr>
+              <a:spcAft>
+                <a:spcPts val="1080"/>
+              </a:spcAft>
+            </a:pPr>
+            <a:r>
+              <a:rPr sz="2400" b="1">
+                <a:solidFill>
+                  <a:srgbClr val="E8793A"/>
+                </a:solidFill>
+                <a:latin typeface="Nunito Sans"/>
+              </a:rPr>
+              <a:t>4. </a:t>
+            </a:r>
+            <a:r>
+              <a:rPr sz="2400" b="0">
+                <a:solidFill>
+                  <a:srgbClr val="1F2A44"/>
+                </a:solidFill>
+                <a:latin typeface="Nunito Sans"/>
+              </a:rPr>
+              <a:t>Conclusión: falso dilema. Hay más salidas de las que dicen.</a:t>
             </a:r>
           </a:p>
         </p:txBody>
